--- a/man/figures/demo-deck.pptx
+++ b/man/figures/demo-deck.pptx
@@ -9,6 +9,7 @@
     <p:sldId id="257" r:id="rId8"/>
     <p:sldId id="258" r:id="rId10"/>
     <p:sldId id="259" r:id="rId11"/>
+    <p:sldId id="260" r:id="rId12"/>
   </p:sldIdLst>
   <p:sldSz cx="12191695" cy="6858000" type="screen4x3"/>
   <p:notesSz cx="6858000" cy="9144000"/>
@@ -3593,7 +3594,7 @@
                 </a:solidFill>
                 <a:latin typeface="Arial"/>
               </a:rPr>
-              <a:t>1 / 4</a:t>
+              <a:t>1 / 5</a:t>
             </a:r>
           </a:p>
         </p:txBody>
@@ -3755,7 +3756,7 @@
                 </a:solidFill>
                 <a:latin typeface="Arial"/>
               </a:rPr>
-              <a:t>2 / 4</a:t>
+              <a:t>2 / 5</a:t>
             </a:r>
           </a:p>
         </p:txBody>
@@ -4038,7 +4039,223 @@
                 </a:solidFill>
                 <a:latin typeface="Arial"/>
               </a:rPr>
-              <a:t>3 / 4</a:t>
+              <a:t>3 / 5</a:t>
+            </a:r>
+          </a:p>
+        </p:txBody>
+      </p:sp>
+      <p:sp>
+        <p:nvSpPr>
+          <p:cNvPr id="4" name="title"/>
+          <p:cNvSpPr txBox="1"/>
+          <p:nvPr/>
+        </p:nvSpPr>
+        <p:spPr>
+          <a:xfrm>
+            <a:off x="640080" y="320040"/>
+            <a:ext cx="10881360" cy="594360"/>
+          </a:xfrm>
+          <a:prstGeom prst="rect">
+            <a:avLst/>
+          </a:prstGeom>
+          <a:noFill/>
+        </p:spPr>
+        <p:txBody>
+          <a:bodyPr wrap="square" lIns="0" rIns="0" tIns="0" bIns="0">
+            <a:spAutoFit/>
+          </a:bodyPr>
+          <a:lstStyle/>
+          <a:p>
+            <a:r>
+              <a:rPr sz="2800" b="1" i="0">
+                <a:solidFill>
+                  <a:srgbClr val="2457A6"/>
+                </a:solidFill>
+                <a:latin typeface="Arial"/>
+              </a:rPr>
+              <a:t>Elimination Half-Life</a:t>
+            </a:r>
+          </a:p>
+        </p:txBody>
+      </p:sp>
+      <p:pic>
+        <p:nvPicPr>
+          <p:cNvPr id="5" name="figure" descr="First-order elimination equation: concentration at time t equals the initial concentration times e to the power of negative the elimination rate constant times t; half-life equals the natural log of 2 divided by the elimination rate constant."/>
+          <p:cNvPicPr>
+            <a:picLocks noChangeAspect="1"/>
+          </p:cNvPicPr>
+          <p:nvPr/>
+        </p:nvPicPr>
+        <p:blipFill>
+          <a:blip r:embed="rId2"/>
+          <a:srcRect/>
+          <a:stretch>
+            <a:fillRect/>
+          </a:stretch>
+        </p:blipFill>
+        <p:spPr>
+          <a:xfrm>
+            <a:off x="640080" y="2512336"/>
+            <a:ext cx="6766560" cy="1741887"/>
+          </a:xfrm>
+          <a:prstGeom prst="rect">
+            <a:avLst/>
+          </a:prstGeom>
+        </p:spPr>
+      </p:pic>
+      <p:sp>
+        <p:nvSpPr>
+          <p:cNvPr id="6" name="note"/>
+          <p:cNvSpPr txBox="1"/>
+          <p:nvPr/>
+        </p:nvSpPr>
+        <p:spPr>
+          <a:xfrm>
+            <a:off x="7589520" y="1143000"/>
+            <a:ext cx="3931920" cy="4480560"/>
+          </a:xfrm>
+          <a:prstGeom prst="rect">
+            <a:avLst/>
+          </a:prstGeom>
+          <a:noFill/>
+        </p:spPr>
+        <p:txBody>
+          <a:bodyPr wrap="square" lIns="0" rIns="0" tIns="0" bIns="0">
+            <a:spAutoFit/>
+          </a:bodyPr>
+          <a:lstStyle/>
+          <a:p>
+            <a:r>
+              <a:rPr sz="1600" b="0" i="0">
+                <a:solidFill>
+                  <a:srgbClr val="202124"/>
+                </a:solidFill>
+                <a:latin typeface="Arial"/>
+              </a:rPr>
+              <a:t>Fitting a simple log-linear elimination model to each of the 12 participants’ terminal-phase concentrations in the built-in `Theoph` dataset gives a population mean elimination half-life of </a:t>
+            </a:r>
+            <a:r>
+              <a:rPr sz="1600" b="1" i="0">
+                <a:solidFill>
+                  <a:srgbClr val="202124"/>
+                </a:solidFill>
+                <a:latin typeface="Arial"/>
+              </a:rPr>
+              <a:t>8.5 hours</a:t>
+            </a:r>
+            <a:r>
+              <a:rPr sz="1600" b="0" i="0">
+                <a:solidFill>
+                  <a:srgbClr val="202124"/>
+                </a:solidFill>
+                <a:latin typeface="Arial"/>
+              </a:rPr>
+              <a:t> – consistent with theophylline’s established ~8-hour half-life.</a:t>
+            </a:r>
+          </a:p>
+          <a:p>
+            <a:r>
+              <a:rPr sz="1600" b="0" i="0">
+                <a:solidFill>
+                  <a:srgbClr val="202124"/>
+                </a:solidFill>
+                <a:latin typeface="Arial"/>
+              </a:rPr>
+              <a:t>This is a simple per-participant regression for illustration, not a population PK model.</a:t>
+            </a:r>
+          </a:p>
+        </p:txBody>
+      </p:sp>
+    </p:spTree>
+  </p:cSld>
+  <p:clrMapOvr>
+    <a:masterClrMapping/>
+  </p:clrMapOvr>
+</p:sld>
+</file>
+
+<file path=ppt/slides/slide4.xml><?xml version="1.0" encoding="utf-8"?>
+<p:sld xmlns:a="http://schemas.openxmlformats.org/drawingml/2006/main" xmlns:p="http://schemas.openxmlformats.org/presentationml/2006/main" xmlns:r="http://schemas.openxmlformats.org/officeDocument/2006/relationships">
+  <p:cSld>
+    <p:bg>
+      <p:bgPr>
+        <a:solidFill>
+          <a:srgbClr val="FFFFFF"/>
+        </a:solidFill>
+        <a:effectLst/>
+      </p:bgPr>
+    </p:bg>
+    <p:spTree>
+      <p:nvGrpSpPr>
+        <p:cNvPr id="1" name=""/>
+        <p:cNvGrpSpPr/>
+        <p:nvPr/>
+      </p:nvGrpSpPr>
+      <p:grpSpPr/>
+      <p:sp>
+        <p:nvSpPr>
+          <p:cNvPr id="2" name="__furniture_branding"/>
+          <p:cNvSpPr txBox="1"/>
+          <p:nvPr/>
+        </p:nvSpPr>
+        <p:spPr>
+          <a:xfrm>
+            <a:off x="320040" y="6446520"/>
+            <a:ext cx="3657600" cy="274320"/>
+          </a:xfrm>
+          <a:prstGeom prst="rect">
+            <a:avLst/>
+          </a:prstGeom>
+          <a:noFill/>
+        </p:spPr>
+        <p:txBody>
+          <a:bodyPr wrap="square" lIns="0" rIns="0" tIns="0" bIns="0">
+            <a:spAutoFit/>
+          </a:bodyPr>
+          <a:lstStyle/>
+          <a:p>
+            <a:r>
+              <a:rPr sz="800" b="0" i="0">
+                <a:solidFill>
+                  <a:srgbClr val="5F6368"/>
+                </a:solidFill>
+                <a:latin typeface="Arial"/>
+              </a:rPr>
+              <a:t>Deckifyr Demo</a:t>
+            </a:r>
+          </a:p>
+        </p:txBody>
+      </p:sp>
+      <p:sp>
+        <p:nvSpPr>
+          <p:cNvPr id="3" name="__furniture_page_number"/>
+          <p:cNvSpPr txBox="1"/>
+          <p:nvPr/>
+        </p:nvSpPr>
+        <p:spPr>
+          <a:xfrm>
+            <a:off x="5029200" y="6446520"/>
+            <a:ext cx="914400" cy="274320"/>
+          </a:xfrm>
+          <a:prstGeom prst="rect">
+            <a:avLst/>
+          </a:prstGeom>
+          <a:noFill/>
+        </p:spPr>
+        <p:txBody>
+          <a:bodyPr wrap="square" lIns="0" rIns="0" tIns="0" bIns="0">
+            <a:spAutoFit/>
+          </a:bodyPr>
+          <a:lstStyle/>
+          <a:p>
+            <a:r>
+              <a:rPr sz="800" b="0" i="0">
+                <a:solidFill>
+                  <a:srgbClr val="5F6368"/>
+                </a:solidFill>
+                <a:latin typeface="Arial"/>
+              </a:rPr>
+              <a:t>4 / 5</a:t>
             </a:r>
           </a:p>
         </p:txBody>
@@ -4072,7 +4289,7 @@
                 </a:solidFill>
                 <a:latin typeface="Arial"/>
               </a:rPr>
-              <a:t>Per-Subject PK Summary</a:t>
+              <a:t>Per-Participant PK Summary</a:t>
             </a:r>
           </a:p>
         </p:txBody>
@@ -4115,7 +4332,7 @@
                           </a:solidFill>
                           <a:latin typeface="Arial"/>
                         </a:rPr>
-                        <a:t>Subject</a:t>
+                        <a:t>Participant</a:t>
                       </a:r>
                     </a:p>
                   </a:txBody>
@@ -6870,7 +7087,7 @@
 </p:sld>
 </file>
 
-<file path=ppt/slides/slide4.xml><?xml version="1.0" encoding="utf-8"?>
+<file path=ppt/slides/slide5.xml><?xml version="1.0" encoding="utf-8"?>
 <p:sld xmlns:a="http://schemas.openxmlformats.org/drawingml/2006/main" xmlns:p="http://schemas.openxmlformats.org/presentationml/2006/main" xmlns:r="http://schemas.openxmlformats.org/officeDocument/2006/relationships">
   <p:cSld>
     <p:bg>
@@ -6951,7 +7168,7 @@
                 </a:solidFill>
                 <a:latin typeface="Arial"/>
               </a:rPr>
-              <a:t>4 / 4</a:t>
+              <a:t>5 / 5</a:t>
             </a:r>
           </a:p>
         </p:txBody>

--- a/man/figures/demo-deck.pptx
+++ b/man/figures/demo-deck.pptx
@@ -3518,9 +3518,17 @@
   <p:cSld>
     <p:bg>
       <p:bgPr>
-        <a:solidFill>
-          <a:srgbClr val="FFFFFF"/>
-        </a:solidFill>
+        <a:gradFill rotWithShape="1">
+          <a:gsLst>
+            <a:gs pos="0">
+              <a:srgbClr val="F7FBFF"/>
+            </a:gs>
+            <a:gs pos="100000">
+              <a:srgbClr val="9ECAE1"/>
+            </a:gs>
+          </a:gsLst>
+          <a:lin scaled="0" ang="13500000"/>
+        </a:gradFill>
         <a:effectLst/>
       </p:bgPr>
     </p:bg>
@@ -3531,9 +3539,34 @@
         <p:nvPr/>
       </p:nvGrpSpPr>
       <p:grpSpPr/>
-      <p:sp>
-        <p:nvSpPr>
-          <p:cNvPr id="2" name="__furniture_branding"/>
+      <p:pic>
+        <p:nvPicPr>
+          <p:cNvPr id="2" name="__furniture_background" descr="Background image"/>
+          <p:cNvPicPr>
+            <a:picLocks noChangeAspect="1"/>
+          </p:cNvPicPr>
+          <p:nvPr/>
+        </p:nvPicPr>
+        <p:blipFill>
+          <a:blip r:embed="rId2"/>
+          <a:srcRect/>
+          <a:stretch>
+            <a:fillRect/>
+          </a:stretch>
+        </p:blipFill>
+        <p:spPr>
+          <a:xfrm>
+            <a:off x="0" y="86"/>
+            <a:ext cx="12191695" cy="6857828"/>
+          </a:xfrm>
+          <a:prstGeom prst="rect">
+            <a:avLst/>
+          </a:prstGeom>
+        </p:spPr>
+      </p:pic>
+      <p:sp>
+        <p:nvSpPr>
+          <p:cNvPr id="3" name="__furniture_branding"/>
           <p:cNvSpPr txBox="1"/>
           <p:nvPr/>
         </p:nvSpPr>
@@ -3567,7 +3600,7 @@
       </p:sp>
       <p:sp>
         <p:nvSpPr>
-          <p:cNvPr id="3" name="__furniture_page_number"/>
+          <p:cNvPr id="4" name="__furniture_page_number"/>
           <p:cNvSpPr txBox="1"/>
           <p:nvPr/>
         </p:nvSpPr>
@@ -3601,7 +3634,7 @@
       </p:sp>
       <p:sp>
         <p:nvSpPr>
-          <p:cNvPr id="4" name="deck-title"/>
+          <p:cNvPr id="5" name="deck-title"/>
           <p:cNvSpPr txBox="1"/>
           <p:nvPr/>
         </p:nvSpPr>
@@ -3635,7 +3668,7 @@
       </p:sp>
       <p:sp>
         <p:nvSpPr>
-          <p:cNvPr id="5" name="deck-subtitle"/>
+          <p:cNvPr id="6" name="deck-subtitle"/>
           <p:cNvSpPr txBox="1"/>
           <p:nvPr/>
         </p:nvSpPr>
@@ -3663,6 +3696,43 @@
                 <a:latin typeface="Arial"/>
               </a:rPr>
               <a:t>Concentration-time profiles from the built-in Theoph dataset</a:t>
+            </a:r>
+          </a:p>
+        </p:txBody>
+      </p:sp>
+      <p:sp>
+        <p:nvSpPr>
+          <p:cNvPr id="7" name="__furniture_status"/>
+          <p:cNvSpPr txBox="1"/>
+          <p:nvPr/>
+        </p:nvSpPr>
+        <p:spPr>
+          <a:xfrm rot="19800000">
+            <a:off x="1371600" y="2286000"/>
+            <a:ext cx="9448495" cy="2286000"/>
+          </a:xfrm>
+          <a:prstGeom prst="rect">
+            <a:avLst/>
+          </a:prstGeom>
+          <a:noFill/>
+        </p:spPr>
+        <p:txBody>
+          <a:bodyPr wrap="square" lIns="0" rIns="0" tIns="0" bIns="0" anchor="ctr">
+            <a:spAutoFit/>
+          </a:bodyPr>
+          <a:lstStyle/>
+          <a:p>
+            <a:pPr algn="ctr"/>
+            <a:r>
+              <a:rPr sz="9600" b="1" i="0">
+                <a:solidFill>
+                  <a:srgbClr val="2457A6">
+                    <a:alpha val="28000"/>
+                  </a:srgbClr>
+                </a:solidFill>
+                <a:latin typeface="Arial"/>
+              </a:rPr>
+              <a:t>DEMO</a:t>
             </a:r>
           </a:p>
         </p:txBody>
@@ -3680,9 +3750,17 @@
   <p:cSld>
     <p:bg>
       <p:bgPr>
-        <a:solidFill>
-          <a:srgbClr val="FFFFFF"/>
-        </a:solidFill>
+        <a:gradFill rotWithShape="1">
+          <a:gsLst>
+            <a:gs pos="0">
+              <a:srgbClr val="F7FBFF"/>
+            </a:gs>
+            <a:gs pos="100000">
+              <a:srgbClr val="9ECAE1"/>
+            </a:gs>
+          </a:gsLst>
+          <a:lin scaled="0" ang="13500000"/>
+        </a:gradFill>
         <a:effectLst/>
       </p:bgPr>
     </p:bg>
@@ -3693,9 +3771,34 @@
         <p:nvPr/>
       </p:nvGrpSpPr>
       <p:grpSpPr/>
-      <p:sp>
-        <p:nvSpPr>
-          <p:cNvPr id="2" name="__furniture_branding"/>
+      <p:pic>
+        <p:nvPicPr>
+          <p:cNvPr id="2" name="__furniture_background" descr="Background image"/>
+          <p:cNvPicPr>
+            <a:picLocks noChangeAspect="1"/>
+          </p:cNvPicPr>
+          <p:nvPr/>
+        </p:nvPicPr>
+        <p:blipFill>
+          <a:blip r:embed="rId2"/>
+          <a:srcRect/>
+          <a:stretch>
+            <a:fillRect/>
+          </a:stretch>
+        </p:blipFill>
+        <p:spPr>
+          <a:xfrm>
+            <a:off x="0" y="86"/>
+            <a:ext cx="12191695" cy="6857828"/>
+          </a:xfrm>
+          <a:prstGeom prst="rect">
+            <a:avLst/>
+          </a:prstGeom>
+        </p:spPr>
+      </p:pic>
+      <p:sp>
+        <p:nvSpPr>
+          <p:cNvPr id="3" name="__furniture_branding"/>
           <p:cNvSpPr txBox="1"/>
           <p:nvPr/>
         </p:nvSpPr>
@@ -3729,7 +3832,7 @@
       </p:sp>
       <p:sp>
         <p:nvSpPr>
-          <p:cNvPr id="3" name="__furniture_page_number"/>
+          <p:cNvPr id="4" name="__furniture_page_number"/>
           <p:cNvSpPr txBox="1"/>
           <p:nvPr/>
         </p:nvSpPr>
@@ -3763,7 +3866,7 @@
       </p:sp>
       <p:sp>
         <p:nvSpPr>
-          <p:cNvPr id="4" name="title"/>
+          <p:cNvPr id="5" name="title"/>
           <p:cNvSpPr txBox="1"/>
           <p:nvPr/>
         </p:nvSpPr>
@@ -3797,14 +3900,14 @@
       </p:sp>
       <p:pic>
         <p:nvPicPr>
-          <p:cNvPr id="5" name="figure" descr="Line plot of theophylline serum concentration over time for each of the 12 participants in the Theoph dataset, showing a rapid rise to peak concentration within the first few hours followed by a gradual decline."/>
+          <p:cNvPr id="6" name="figure" descr="Line plot of theophylline serum concentration over time for each of the 12 participants in the Theoph dataset, showing a rapid rise to peak concentration within the first few hours followed by a gradual decline."/>
           <p:cNvPicPr>
             <a:picLocks noChangeAspect="1"/>
           </p:cNvPicPr>
           <p:nvPr/>
         </p:nvPicPr>
         <p:blipFill>
-          <a:blip r:embed="rId2"/>
+          <a:blip r:embed="rId3"/>
           <a:srcRect/>
           <a:stretch>
             <a:fillRect/>
@@ -3822,7 +3925,7 @@
       </p:pic>
       <p:sp>
         <p:nvSpPr>
-          <p:cNvPr id="6" name="figure__footer"/>
+          <p:cNvPr id="7" name="figure__footer"/>
           <p:cNvSpPr txBox="1"/>
           <p:nvPr/>
         </p:nvSpPr>
@@ -3878,7 +3981,7 @@
       </p:sp>
       <p:sp>
         <p:nvSpPr>
-          <p:cNvPr id="7" name="note"/>
+          <p:cNvPr id="8" name="note"/>
           <p:cNvSpPr txBox="1"/>
           <p:nvPr/>
         </p:nvSpPr>
@@ -3946,6 +4049,43 @@
                 <a:latin typeface="Arial"/>
               </a:rPr>
               <a:t>Each line traces one participant's observed PK profile after a single oral dose; no model-based estimation was performed.</a:t>
+            </a:r>
+          </a:p>
+        </p:txBody>
+      </p:sp>
+      <p:sp>
+        <p:nvSpPr>
+          <p:cNvPr id="9" name="__furniture_status"/>
+          <p:cNvSpPr txBox="1"/>
+          <p:nvPr/>
+        </p:nvSpPr>
+        <p:spPr>
+          <a:xfrm rot="19800000">
+            <a:off x="1371600" y="2286000"/>
+            <a:ext cx="9448495" cy="2286000"/>
+          </a:xfrm>
+          <a:prstGeom prst="rect">
+            <a:avLst/>
+          </a:prstGeom>
+          <a:noFill/>
+        </p:spPr>
+        <p:txBody>
+          <a:bodyPr wrap="square" lIns="0" rIns="0" tIns="0" bIns="0" anchor="ctr">
+            <a:spAutoFit/>
+          </a:bodyPr>
+          <a:lstStyle/>
+          <a:p>
+            <a:pPr algn="ctr"/>
+            <a:r>
+              <a:rPr sz="9600" b="1" i="0">
+                <a:solidFill>
+                  <a:srgbClr val="2457A6">
+                    <a:alpha val="28000"/>
+                  </a:srgbClr>
+                </a:solidFill>
+                <a:latin typeface="Arial"/>
+              </a:rPr>
+              <a:t>DEMO</a:t>
             </a:r>
           </a:p>
         </p:txBody>
@@ -3963,9 +4103,17 @@
   <p:cSld>
     <p:bg>
       <p:bgPr>
-        <a:solidFill>
-          <a:srgbClr val="FFFFFF"/>
-        </a:solidFill>
+        <a:gradFill rotWithShape="1">
+          <a:gsLst>
+            <a:gs pos="0">
+              <a:srgbClr val="F7FBFF"/>
+            </a:gs>
+            <a:gs pos="100000">
+              <a:srgbClr val="9ECAE1"/>
+            </a:gs>
+          </a:gsLst>
+          <a:lin scaled="0" ang="13500000"/>
+        </a:gradFill>
         <a:effectLst/>
       </p:bgPr>
     </p:bg>
@@ -3976,9 +4124,34 @@
         <p:nvPr/>
       </p:nvGrpSpPr>
       <p:grpSpPr/>
-      <p:sp>
-        <p:nvSpPr>
-          <p:cNvPr id="2" name="__furniture_branding"/>
+      <p:pic>
+        <p:nvPicPr>
+          <p:cNvPr id="2" name="__furniture_background" descr="Background image"/>
+          <p:cNvPicPr>
+            <a:picLocks noChangeAspect="1"/>
+          </p:cNvPicPr>
+          <p:nvPr/>
+        </p:nvPicPr>
+        <p:blipFill>
+          <a:blip r:embed="rId2"/>
+          <a:srcRect/>
+          <a:stretch>
+            <a:fillRect/>
+          </a:stretch>
+        </p:blipFill>
+        <p:spPr>
+          <a:xfrm>
+            <a:off x="0" y="86"/>
+            <a:ext cx="12191695" cy="6857828"/>
+          </a:xfrm>
+          <a:prstGeom prst="rect">
+            <a:avLst/>
+          </a:prstGeom>
+        </p:spPr>
+      </p:pic>
+      <p:sp>
+        <p:nvSpPr>
+          <p:cNvPr id="3" name="__furniture_branding"/>
           <p:cNvSpPr txBox="1"/>
           <p:nvPr/>
         </p:nvSpPr>
@@ -4012,7 +4185,7 @@
       </p:sp>
       <p:sp>
         <p:nvSpPr>
-          <p:cNvPr id="3" name="__furniture_page_number"/>
+          <p:cNvPr id="4" name="__furniture_page_number"/>
           <p:cNvSpPr txBox="1"/>
           <p:nvPr/>
         </p:nvSpPr>
@@ -4046,7 +4219,7 @@
       </p:sp>
       <p:sp>
         <p:nvSpPr>
-          <p:cNvPr id="4" name="title"/>
+          <p:cNvPr id="5" name="title"/>
           <p:cNvSpPr txBox="1"/>
           <p:nvPr/>
         </p:nvSpPr>
@@ -4080,14 +4253,14 @@
       </p:sp>
       <p:pic>
         <p:nvPicPr>
-          <p:cNvPr id="5" name="figure" descr="First-order elimination equation: concentration at time t equals the initial concentration times e to the power of negative the elimination rate constant times t; half-life equals the natural log of 2 divided by the elimination rate constant."/>
+          <p:cNvPr id="6" name="figure" descr="First-order elimination equation: concentration at time t equals the initial concentration times e to the power of negative the elimination rate constant times t; half-life equals the natural log of 2 divided by the elimination rate constant."/>
           <p:cNvPicPr>
             <a:picLocks noChangeAspect="1"/>
           </p:cNvPicPr>
           <p:nvPr/>
         </p:nvPicPr>
         <p:blipFill>
-          <a:blip r:embed="rId2"/>
+          <a:blip r:embed="rId3"/>
           <a:srcRect/>
           <a:stretch>
             <a:fillRect/>
@@ -4105,7 +4278,7 @@
       </p:pic>
       <p:sp>
         <p:nvSpPr>
-          <p:cNvPr id="6" name="note"/>
+          <p:cNvPr id="7" name="note"/>
           <p:cNvSpPr txBox="1"/>
           <p:nvPr/>
         </p:nvSpPr>
@@ -4162,6 +4335,43 @@
                 <a:latin typeface="Arial"/>
               </a:rPr>
               <a:t>This is a simple per-participant regression for illustration, not a population PK model.</a:t>
+            </a:r>
+          </a:p>
+        </p:txBody>
+      </p:sp>
+      <p:sp>
+        <p:nvSpPr>
+          <p:cNvPr id="8" name="__furniture_status"/>
+          <p:cNvSpPr txBox="1"/>
+          <p:nvPr/>
+        </p:nvSpPr>
+        <p:spPr>
+          <a:xfrm rot="19800000">
+            <a:off x="1371600" y="2286000"/>
+            <a:ext cx="9448495" cy="2286000"/>
+          </a:xfrm>
+          <a:prstGeom prst="rect">
+            <a:avLst/>
+          </a:prstGeom>
+          <a:noFill/>
+        </p:spPr>
+        <p:txBody>
+          <a:bodyPr wrap="square" lIns="0" rIns="0" tIns="0" bIns="0" anchor="ctr">
+            <a:spAutoFit/>
+          </a:bodyPr>
+          <a:lstStyle/>
+          <a:p>
+            <a:pPr algn="ctr"/>
+            <a:r>
+              <a:rPr sz="9600" b="1" i="0">
+                <a:solidFill>
+                  <a:srgbClr val="2457A6">
+                    <a:alpha val="28000"/>
+                  </a:srgbClr>
+                </a:solidFill>
+                <a:latin typeface="Arial"/>
+              </a:rPr>
+              <a:t>DEMO</a:t>
             </a:r>
           </a:p>
         </p:txBody>
@@ -4179,9 +4389,17 @@
   <p:cSld>
     <p:bg>
       <p:bgPr>
-        <a:solidFill>
-          <a:srgbClr val="FFFFFF"/>
-        </a:solidFill>
+        <a:gradFill rotWithShape="1">
+          <a:gsLst>
+            <a:gs pos="0">
+              <a:srgbClr val="F7FBFF"/>
+            </a:gs>
+            <a:gs pos="100000">
+              <a:srgbClr val="9ECAE1"/>
+            </a:gs>
+          </a:gsLst>
+          <a:lin scaled="0" ang="13500000"/>
+        </a:gradFill>
         <a:effectLst/>
       </p:bgPr>
     </p:bg>
@@ -4192,9 +4410,34 @@
         <p:nvPr/>
       </p:nvGrpSpPr>
       <p:grpSpPr/>
-      <p:sp>
-        <p:nvSpPr>
-          <p:cNvPr id="2" name="__furniture_branding"/>
+      <p:pic>
+        <p:nvPicPr>
+          <p:cNvPr id="2" name="__furniture_background" descr="Background image"/>
+          <p:cNvPicPr>
+            <a:picLocks noChangeAspect="1"/>
+          </p:cNvPicPr>
+          <p:nvPr/>
+        </p:nvPicPr>
+        <p:blipFill>
+          <a:blip r:embed="rId2"/>
+          <a:srcRect/>
+          <a:stretch>
+            <a:fillRect/>
+          </a:stretch>
+        </p:blipFill>
+        <p:spPr>
+          <a:xfrm>
+            <a:off x="0" y="86"/>
+            <a:ext cx="12191695" cy="6857828"/>
+          </a:xfrm>
+          <a:prstGeom prst="rect">
+            <a:avLst/>
+          </a:prstGeom>
+        </p:spPr>
+      </p:pic>
+      <p:sp>
+        <p:nvSpPr>
+          <p:cNvPr id="3" name="__furniture_branding"/>
           <p:cNvSpPr txBox="1"/>
           <p:nvPr/>
         </p:nvSpPr>
@@ -4228,7 +4471,7 @@
       </p:sp>
       <p:sp>
         <p:nvSpPr>
-          <p:cNvPr id="3" name="__furniture_page_number"/>
+          <p:cNvPr id="4" name="__furniture_page_number"/>
           <p:cNvSpPr txBox="1"/>
           <p:nvPr/>
         </p:nvSpPr>
@@ -4262,7 +4505,7 @@
       </p:sp>
       <p:sp>
         <p:nvSpPr>
-          <p:cNvPr id="4" name="table-title"/>
+          <p:cNvPr id="5" name="table-title"/>
           <p:cNvSpPr txBox="1"/>
           <p:nvPr/>
         </p:nvSpPr>
@@ -4296,7 +4539,7 @@
       </p:sp>
       <p:graphicFrame>
         <p:nvGraphicFramePr>
-          <p:cNvPr id="5" name="pk-table" descr="Table of weight, dose, peak concentration, and time to peak concentration for each of the 12 participants in the Theoph dataset."/>
+          <p:cNvPr id="6" name="pk-table" descr="Table of weight, dose, peak concentration, and time to peak concentration for each of the 12 participants in the Theoph dataset."/>
           <p:cNvGraphicFramePr>
             <a:graphicFrameLocks noGrp="1"/>
           </p:cNvGraphicFramePr>
@@ -7079,6 +7322,43 @@
           </a:graphicData>
         </a:graphic>
       </p:graphicFrame>
+      <p:sp>
+        <p:nvSpPr>
+          <p:cNvPr id="7" name="__furniture_status"/>
+          <p:cNvSpPr txBox="1"/>
+          <p:nvPr/>
+        </p:nvSpPr>
+        <p:spPr>
+          <a:xfrm rot="19800000">
+            <a:off x="1371600" y="2286000"/>
+            <a:ext cx="9448495" cy="2286000"/>
+          </a:xfrm>
+          <a:prstGeom prst="rect">
+            <a:avLst/>
+          </a:prstGeom>
+          <a:noFill/>
+        </p:spPr>
+        <p:txBody>
+          <a:bodyPr wrap="square" lIns="0" rIns="0" tIns="0" bIns="0" anchor="ctr">
+            <a:spAutoFit/>
+          </a:bodyPr>
+          <a:lstStyle/>
+          <a:p>
+            <a:pPr algn="ctr"/>
+            <a:r>
+              <a:rPr sz="9600" b="1" i="0">
+                <a:solidFill>
+                  <a:srgbClr val="2457A6">
+                    <a:alpha val="28000"/>
+                  </a:srgbClr>
+                </a:solidFill>
+                <a:latin typeface="Arial"/>
+              </a:rPr>
+              <a:t>DEMO</a:t>
+            </a:r>
+          </a:p>
+        </p:txBody>
+      </p:sp>
     </p:spTree>
   </p:cSld>
   <p:clrMapOvr>
@@ -7092,9 +7372,17 @@
   <p:cSld>
     <p:bg>
       <p:bgPr>
-        <a:solidFill>
-          <a:srgbClr val="FFFFFF"/>
-        </a:solidFill>
+        <a:gradFill rotWithShape="1">
+          <a:gsLst>
+            <a:gs pos="0">
+              <a:srgbClr val="F7FBFF"/>
+            </a:gs>
+            <a:gs pos="100000">
+              <a:srgbClr val="9ECAE1"/>
+            </a:gs>
+          </a:gsLst>
+          <a:lin scaled="0" ang="13500000"/>
+        </a:gradFill>
         <a:effectLst/>
       </p:bgPr>
     </p:bg>
@@ -7105,9 +7393,34 @@
         <p:nvPr/>
       </p:nvGrpSpPr>
       <p:grpSpPr/>
-      <p:sp>
-        <p:nvSpPr>
-          <p:cNvPr id="2" name="__furniture_branding"/>
+      <p:pic>
+        <p:nvPicPr>
+          <p:cNvPr id="2" name="__furniture_background" descr="Background image"/>
+          <p:cNvPicPr>
+            <a:picLocks noChangeAspect="1"/>
+          </p:cNvPicPr>
+          <p:nvPr/>
+        </p:nvPicPr>
+        <p:blipFill>
+          <a:blip r:embed="rId2"/>
+          <a:srcRect/>
+          <a:stretch>
+            <a:fillRect/>
+          </a:stretch>
+        </p:blipFill>
+        <p:spPr>
+          <a:xfrm>
+            <a:off x="0" y="86"/>
+            <a:ext cx="12191695" cy="6857828"/>
+          </a:xfrm>
+          <a:prstGeom prst="rect">
+            <a:avLst/>
+          </a:prstGeom>
+        </p:spPr>
+      </p:pic>
+      <p:sp>
+        <p:nvSpPr>
+          <p:cNvPr id="3" name="__furniture_branding"/>
           <p:cNvSpPr txBox="1"/>
           <p:nvPr/>
         </p:nvSpPr>
@@ -7141,7 +7454,7 @@
       </p:sp>
       <p:sp>
         <p:nvSpPr>
-          <p:cNvPr id="3" name="__furniture_page_number"/>
+          <p:cNvPr id="4" name="__furniture_page_number"/>
           <p:cNvSpPr txBox="1"/>
           <p:nvPr/>
         </p:nvSpPr>
@@ -7175,7 +7488,7 @@
       </p:sp>
       <p:sp>
         <p:nvSpPr>
-          <p:cNvPr id="4" name="closing-title"/>
+          <p:cNvPr id="5" name="closing-title"/>
           <p:cNvSpPr txBox="1"/>
           <p:nvPr/>
         </p:nvSpPr>
@@ -7209,7 +7522,7 @@
       </p:sp>
       <p:sp>
         <p:nvSpPr>
-          <p:cNvPr id="5" name="closing-note"/>
+          <p:cNvPr id="6" name="closing-note"/>
           <p:cNvSpPr txBox="1"/>
           <p:nvPr/>
         </p:nvSpPr>
@@ -7261,14 +7574,14 @@
       </p:sp>
       <p:pic>
         <p:nvPicPr>
-          <p:cNvPr id="6" name="logo" descr="Organization logo"/>
+          <p:cNvPr id="7" name="logo" descr="Organization logo"/>
           <p:cNvPicPr>
             <a:picLocks noChangeAspect="1"/>
           </p:cNvPicPr>
           <p:nvPr/>
         </p:nvPicPr>
         <p:blipFill>
-          <a:blip r:embed="rId2"/>
+          <a:blip r:embed="rId3"/>
           <a:srcRect/>
           <a:stretch>
             <a:fillRect/>
@@ -7284,6 +7597,43 @@
           </a:prstGeom>
         </p:spPr>
       </p:pic>
+      <p:sp>
+        <p:nvSpPr>
+          <p:cNvPr id="8" name="__furniture_status"/>
+          <p:cNvSpPr txBox="1"/>
+          <p:nvPr/>
+        </p:nvSpPr>
+        <p:spPr>
+          <a:xfrm rot="19800000">
+            <a:off x="1371600" y="2286000"/>
+            <a:ext cx="9448495" cy="2286000"/>
+          </a:xfrm>
+          <a:prstGeom prst="rect">
+            <a:avLst/>
+          </a:prstGeom>
+          <a:noFill/>
+        </p:spPr>
+        <p:txBody>
+          <a:bodyPr wrap="square" lIns="0" rIns="0" tIns="0" bIns="0" anchor="ctr">
+            <a:spAutoFit/>
+          </a:bodyPr>
+          <a:lstStyle/>
+          <a:p>
+            <a:pPr algn="ctr"/>
+            <a:r>
+              <a:rPr sz="9600" b="1" i="0">
+                <a:solidFill>
+                  <a:srgbClr val="2457A6">
+                    <a:alpha val="28000"/>
+                  </a:srgbClr>
+                </a:solidFill>
+                <a:latin typeface="Arial"/>
+              </a:rPr>
+              <a:t>DEMO</a:t>
+            </a:r>
+          </a:p>
+        </p:txBody>
+      </p:sp>
     </p:spTree>
   </p:cSld>
   <p:clrMapOvr>

--- a/man/figures/demo-deck.pptx
+++ b/man/figures/demo-deck.pptx
@@ -5025,7 +5025,7 @@
                       </a:solidFill>
                     </a:lnB>
                     <a:solidFill>
-                      <a:srgbClr val="EEF3FB"/>
+                      <a:srgbClr val="E8EFFA"/>
                     </a:solidFill>
                   </a:tcPr>
                 </a:tc>
@@ -5067,7 +5067,7 @@
                       </a:solidFill>
                     </a:lnB>
                     <a:solidFill>
-                      <a:srgbClr val="EEF3FB"/>
+                      <a:srgbClr val="E8EFFA"/>
                     </a:solidFill>
                   </a:tcPr>
                 </a:tc>
@@ -5109,7 +5109,7 @@
                       </a:solidFill>
                     </a:lnB>
                     <a:solidFill>
-                      <a:srgbClr val="EEF3FB"/>
+                      <a:srgbClr val="E8EFFA"/>
                     </a:solidFill>
                   </a:tcPr>
                 </a:tc>
@@ -5151,7 +5151,7 @@
                       </a:solidFill>
                     </a:lnB>
                     <a:solidFill>
-                      <a:srgbClr val="EEF3FB"/>
+                      <a:srgbClr val="E8EFFA"/>
                     </a:solidFill>
                   </a:tcPr>
                 </a:tc>
@@ -5193,7 +5193,7 @@
                       </a:solidFill>
                     </a:lnB>
                     <a:solidFill>
-                      <a:srgbClr val="EEF3FB"/>
+                      <a:srgbClr val="E8EFFA"/>
                     </a:solidFill>
                   </a:tcPr>
                 </a:tc>
@@ -5449,7 +5449,7 @@
                       </a:solidFill>
                     </a:lnB>
                     <a:solidFill>
-                      <a:srgbClr val="EEF3FB"/>
+                      <a:srgbClr val="E8EFFA"/>
                     </a:solidFill>
                   </a:tcPr>
                 </a:tc>
@@ -5491,7 +5491,7 @@
                       </a:solidFill>
                     </a:lnB>
                     <a:solidFill>
-                      <a:srgbClr val="EEF3FB"/>
+                      <a:srgbClr val="E8EFFA"/>
                     </a:solidFill>
                   </a:tcPr>
                 </a:tc>
@@ -5533,7 +5533,7 @@
                       </a:solidFill>
                     </a:lnB>
                     <a:solidFill>
-                      <a:srgbClr val="EEF3FB"/>
+                      <a:srgbClr val="E8EFFA"/>
                     </a:solidFill>
                   </a:tcPr>
                 </a:tc>
@@ -5575,7 +5575,7 @@
                       </a:solidFill>
                     </a:lnB>
                     <a:solidFill>
-                      <a:srgbClr val="EEF3FB"/>
+                      <a:srgbClr val="E8EFFA"/>
                     </a:solidFill>
                   </a:tcPr>
                 </a:tc>
@@ -5617,7 +5617,7 @@
                       </a:solidFill>
                     </a:lnB>
                     <a:solidFill>
-                      <a:srgbClr val="EEF3FB"/>
+                      <a:srgbClr val="E8EFFA"/>
                     </a:solidFill>
                   </a:tcPr>
                 </a:tc>
@@ -5873,7 +5873,7 @@
                       </a:solidFill>
                     </a:lnB>
                     <a:solidFill>
-                      <a:srgbClr val="EEF3FB"/>
+                      <a:srgbClr val="E8EFFA"/>
                     </a:solidFill>
                   </a:tcPr>
                 </a:tc>
@@ -5915,7 +5915,7 @@
                       </a:solidFill>
                     </a:lnB>
                     <a:solidFill>
-                      <a:srgbClr val="EEF3FB"/>
+                      <a:srgbClr val="E8EFFA"/>
                     </a:solidFill>
                   </a:tcPr>
                 </a:tc>
@@ -5957,7 +5957,7 @@
                       </a:solidFill>
                     </a:lnB>
                     <a:solidFill>
-                      <a:srgbClr val="EEF3FB"/>
+                      <a:srgbClr val="E8EFFA"/>
                     </a:solidFill>
                   </a:tcPr>
                 </a:tc>
@@ -5999,7 +5999,7 @@
                       </a:solidFill>
                     </a:lnB>
                     <a:solidFill>
-                      <a:srgbClr val="EEF3FB"/>
+                      <a:srgbClr val="E8EFFA"/>
                     </a:solidFill>
                   </a:tcPr>
                 </a:tc>
@@ -6041,7 +6041,7 @@
                       </a:solidFill>
                     </a:lnB>
                     <a:solidFill>
-                      <a:srgbClr val="EEF3FB"/>
+                      <a:srgbClr val="E8EFFA"/>
                     </a:solidFill>
                   </a:tcPr>
                 </a:tc>
@@ -6297,7 +6297,7 @@
                       </a:solidFill>
                     </a:lnB>
                     <a:solidFill>
-                      <a:srgbClr val="EEF3FB"/>
+                      <a:srgbClr val="E8EFFA"/>
                     </a:solidFill>
                   </a:tcPr>
                 </a:tc>
@@ -6339,7 +6339,7 @@
                       </a:solidFill>
                     </a:lnB>
                     <a:solidFill>
-                      <a:srgbClr val="EEF3FB"/>
+                      <a:srgbClr val="E8EFFA"/>
                     </a:solidFill>
                   </a:tcPr>
                 </a:tc>
@@ -6381,7 +6381,7 @@
                       </a:solidFill>
                     </a:lnB>
                     <a:solidFill>
-                      <a:srgbClr val="EEF3FB"/>
+                      <a:srgbClr val="E8EFFA"/>
                     </a:solidFill>
                   </a:tcPr>
                 </a:tc>
@@ -6423,7 +6423,7 @@
                       </a:solidFill>
                     </a:lnB>
                     <a:solidFill>
-                      <a:srgbClr val="EEF3FB"/>
+                      <a:srgbClr val="E8EFFA"/>
                     </a:solidFill>
                   </a:tcPr>
                 </a:tc>
@@ -6465,7 +6465,7 @@
                       </a:solidFill>
                     </a:lnB>
                     <a:solidFill>
-                      <a:srgbClr val="EEF3FB"/>
+                      <a:srgbClr val="E8EFFA"/>
                     </a:solidFill>
                   </a:tcPr>
                 </a:tc>
@@ -6721,7 +6721,7 @@
                       </a:solidFill>
                     </a:lnB>
                     <a:solidFill>
-                      <a:srgbClr val="EEF3FB"/>
+                      <a:srgbClr val="E8EFFA"/>
                     </a:solidFill>
                   </a:tcPr>
                 </a:tc>
@@ -6763,7 +6763,7 @@
                       </a:solidFill>
                     </a:lnB>
                     <a:solidFill>
-                      <a:srgbClr val="EEF3FB"/>
+                      <a:srgbClr val="E8EFFA"/>
                     </a:solidFill>
                   </a:tcPr>
                 </a:tc>
@@ -6805,7 +6805,7 @@
                       </a:solidFill>
                     </a:lnB>
                     <a:solidFill>
-                      <a:srgbClr val="EEF3FB"/>
+                      <a:srgbClr val="E8EFFA"/>
                     </a:solidFill>
                   </a:tcPr>
                 </a:tc>
@@ -6847,7 +6847,7 @@
                       </a:solidFill>
                     </a:lnB>
                     <a:solidFill>
-                      <a:srgbClr val="EEF3FB"/>
+                      <a:srgbClr val="E8EFFA"/>
                     </a:solidFill>
                   </a:tcPr>
                 </a:tc>
@@ -6889,7 +6889,7 @@
                       </a:solidFill>
                     </a:lnB>
                     <a:solidFill>
-                      <a:srgbClr val="EEF3FB"/>
+                      <a:srgbClr val="E8EFFA"/>
                     </a:solidFill>
                   </a:tcPr>
                 </a:tc>
@@ -7145,7 +7145,7 @@
                       </a:solidFill>
                     </a:lnB>
                     <a:solidFill>
-                      <a:srgbClr val="EEF3FB"/>
+                      <a:srgbClr val="E8EFFA"/>
                     </a:solidFill>
                   </a:tcPr>
                 </a:tc>
@@ -7187,7 +7187,7 @@
                       </a:solidFill>
                     </a:lnB>
                     <a:solidFill>
-                      <a:srgbClr val="EEF3FB"/>
+                      <a:srgbClr val="E8EFFA"/>
                     </a:solidFill>
                   </a:tcPr>
                 </a:tc>
@@ -7229,7 +7229,7 @@
                       </a:solidFill>
                     </a:lnB>
                     <a:solidFill>
-                      <a:srgbClr val="EEF3FB"/>
+                      <a:srgbClr val="E8EFFA"/>
                     </a:solidFill>
                   </a:tcPr>
                 </a:tc>
@@ -7271,7 +7271,7 @@
                       </a:solidFill>
                     </a:lnB>
                     <a:solidFill>
-                      <a:srgbClr val="EEF3FB"/>
+                      <a:srgbClr val="E8EFFA"/>
                     </a:solidFill>
                   </a:tcPr>
                 </a:tc>
@@ -7313,7 +7313,7 @@
                       </a:solidFill>
                     </a:lnB>
                     <a:solidFill>
-                      <a:srgbClr val="EEF3FB"/>
+                      <a:srgbClr val="E8EFFA"/>
                     </a:solidFill>
                   </a:tcPr>
                 </a:tc>

--- a/man/figures/demo-deck.pptx
+++ b/man/figures/demo-deck.pptx
@@ -10,6 +10,7 @@
     <p:sldId id="258" r:id="rId10"/>
     <p:sldId id="259" r:id="rId11"/>
     <p:sldId id="260" r:id="rId12"/>
+    <p:sldId id="261" r:id="rId13"/>
   </p:sldIdLst>
   <p:sldSz cx="12191695" cy="6858000" type="screen4x3"/>
   <p:notesSz cx="6858000" cy="9144000"/>
@@ -3627,7 +3628,7 @@
                 </a:solidFill>
                 <a:latin typeface="Arial"/>
               </a:rPr>
-              <a:t>1 / 5</a:t>
+              <a:t>1 / 6</a:t>
             </a:r>
           </a:p>
         </p:txBody>
@@ -3859,7 +3860,7 @@
                 </a:solidFill>
                 <a:latin typeface="Arial"/>
               </a:rPr>
-              <a:t>2 / 5</a:t>
+              <a:t>2 / 6</a:t>
             </a:r>
           </a:p>
         </p:txBody>
@@ -4212,7 +4213,7 @@
                 </a:solidFill>
                 <a:latin typeface="Arial"/>
               </a:rPr>
-              <a:t>3 / 5</a:t>
+              <a:t>3 / 6</a:t>
             </a:r>
           </a:p>
         </p:txBody>
@@ -4498,7 +4499,7 @@
                 </a:solidFill>
                 <a:latin typeface="Arial"/>
               </a:rPr>
-              <a:t>4 / 5</a:t>
+              <a:t>4 / 6</a:t>
             </a:r>
           </a:p>
         </p:txBody>
@@ -7481,7 +7482,3094 @@
                 </a:solidFill>
                 <a:latin typeface="Arial"/>
               </a:rPr>
-              <a:t>5 / 5</a:t>
+              <a:t>5 / 6</a:t>
+            </a:r>
+          </a:p>
+        </p:txBody>
+      </p:sp>
+      <p:sp>
+        <p:nvSpPr>
+          <p:cNvPr id="5" name="table-formats-title"/>
+          <p:cNvSpPr txBox="1"/>
+          <p:nvPr/>
+        </p:nvSpPr>
+        <p:spPr>
+          <a:xfrm>
+            <a:off x="822960" y="457200"/>
+            <a:ext cx="10515600" cy="594360"/>
+          </a:xfrm>
+          <a:prstGeom prst="rect">
+            <a:avLst/>
+          </a:prstGeom>
+          <a:noFill/>
+        </p:spPr>
+        <p:txBody>
+          <a:bodyPr wrap="square" lIns="0" rIns="0" tIns="0" bIns="0">
+            <a:spAutoFit/>
+          </a:bodyPr>
+          <a:lstStyle/>
+          <a:p>
+            <a:r>
+              <a:rPr sz="2800" b="1" i="0">
+                <a:solidFill>
+                  <a:srgbClr val="2457A6"/>
+                </a:solidFill>
+                <a:latin typeface="Arial"/>
+              </a:rPr>
+              <a:t>Reportifyr Table Formats: Native vs. Flextable</a:t>
+            </a:r>
+          </a:p>
+        </p:txBody>
+      </p:sp>
+      <p:graphicFrame>
+        <p:nvGraphicFramePr>
+          <p:cNvPr id="6" name="raw-table" descr="Table of weight, dose, peak concentration, and time to peak concentration for each of the 12 participants in the Theoph dataset."/>
+          <p:cNvGraphicFramePr>
+            <a:graphicFrameLocks noGrp="1"/>
+          </p:cNvGraphicFramePr>
+          <p:nvPr/>
+        </p:nvGraphicFramePr>
+        <p:xfrm>
+          <a:off x="548640" y="1234440"/>
+          <a:ext cx="6949440" cy="3931920"/>
+        </p:xfrm>
+        <a:graphic>
+          <a:graphicData uri="http://schemas.openxmlformats.org/drawingml/2006/table">
+            <a:tbl>
+              <a:tblPr firstRow="1" bandRow="1">
+                <a:tableStyleId>{5C22544A-7EE6-4342-B048-85BDC9FD1C3A}</a:tableStyleId>
+              </a:tblPr>
+              <a:tblGrid>
+                <a:gridCol w="1389888"/>
+                <a:gridCol w="1389888"/>
+                <a:gridCol w="1389888"/>
+                <a:gridCol w="1389888"/>
+                <a:gridCol w="1389888"/>
+              </a:tblGrid>
+              <a:tr h="302455">
+                <a:tc>
+                  <a:txBody>
+                    <a:bodyPr/>
+                    <a:lstStyle/>
+                    <a:p>
+                      <a:r>
+                        <a:rPr sz="1300" b="1" i="0">
+                          <a:solidFill>
+                            <a:srgbClr val="FFFFFF"/>
+                          </a:solidFill>
+                          <a:latin typeface="Arial"/>
+                        </a:rPr>
+                        <a:t>Participant</a:t>
+                      </a:r>
+                    </a:p>
+                  </a:txBody>
+                  <a:tcPr>
+                    <a:lnL w="9525">
+                      <a:solidFill>
+                        <a:srgbClr val="5F6368"/>
+                      </a:solidFill>
+                    </a:lnL>
+                    <a:lnR w="9525">
+                      <a:solidFill>
+                        <a:srgbClr val="5F6368"/>
+                      </a:solidFill>
+                    </a:lnR>
+                    <a:lnT w="9525">
+                      <a:solidFill>
+                        <a:srgbClr val="5F6368"/>
+                      </a:solidFill>
+                    </a:lnT>
+                    <a:lnB w="9525">
+                      <a:solidFill>
+                        <a:srgbClr val="5F6368"/>
+                      </a:solidFill>
+                    </a:lnB>
+                    <a:solidFill>
+                      <a:srgbClr val="2457A6"/>
+                    </a:solidFill>
+                  </a:tcPr>
+                </a:tc>
+                <a:tc>
+                  <a:txBody>
+                    <a:bodyPr/>
+                    <a:lstStyle/>
+                    <a:p>
+                      <a:r>
+                        <a:rPr sz="1300" b="1" i="0">
+                          <a:solidFill>
+                            <a:srgbClr val="FFFFFF"/>
+                          </a:solidFill>
+                          <a:latin typeface="Arial"/>
+                        </a:rPr>
+                        <a:t>Weight (kg)</a:t>
+                      </a:r>
+                    </a:p>
+                  </a:txBody>
+                  <a:tcPr>
+                    <a:lnL w="9525">
+                      <a:solidFill>
+                        <a:srgbClr val="5F6368"/>
+                      </a:solidFill>
+                    </a:lnL>
+                    <a:lnR w="9525">
+                      <a:solidFill>
+                        <a:srgbClr val="5F6368"/>
+                      </a:solidFill>
+                    </a:lnR>
+                    <a:lnT w="9525">
+                      <a:solidFill>
+                        <a:srgbClr val="5F6368"/>
+                      </a:solidFill>
+                    </a:lnT>
+                    <a:lnB w="9525">
+                      <a:solidFill>
+                        <a:srgbClr val="5F6368"/>
+                      </a:solidFill>
+                    </a:lnB>
+                    <a:solidFill>
+                      <a:srgbClr val="2457A6"/>
+                    </a:solidFill>
+                  </a:tcPr>
+                </a:tc>
+                <a:tc>
+                  <a:txBody>
+                    <a:bodyPr/>
+                    <a:lstStyle/>
+                    <a:p>
+                      <a:r>
+                        <a:rPr sz="1300" b="1" i="0">
+                          <a:solidFill>
+                            <a:srgbClr val="FFFFFF"/>
+                          </a:solidFill>
+                          <a:latin typeface="Arial"/>
+                        </a:rPr>
+                        <a:t>Dose (mg/kg)</a:t>
+                      </a:r>
+                    </a:p>
+                  </a:txBody>
+                  <a:tcPr>
+                    <a:lnL w="9525">
+                      <a:solidFill>
+                        <a:srgbClr val="5F6368"/>
+                      </a:solidFill>
+                    </a:lnL>
+                    <a:lnR w="9525">
+                      <a:solidFill>
+                        <a:srgbClr val="5F6368"/>
+                      </a:solidFill>
+                    </a:lnR>
+                    <a:lnT w="9525">
+                      <a:solidFill>
+                        <a:srgbClr val="5F6368"/>
+                      </a:solidFill>
+                    </a:lnT>
+                    <a:lnB w="9525">
+                      <a:solidFill>
+                        <a:srgbClr val="5F6368"/>
+                      </a:solidFill>
+                    </a:lnB>
+                    <a:solidFill>
+                      <a:srgbClr val="2457A6"/>
+                    </a:solidFill>
+                  </a:tcPr>
+                </a:tc>
+                <a:tc>
+                  <a:txBody>
+                    <a:bodyPr/>
+                    <a:lstStyle/>
+                    <a:p>
+                      <a:r>
+                        <a:rPr sz="1300" b="1" i="0">
+                          <a:solidFill>
+                            <a:srgbClr val="FFFFFF"/>
+                          </a:solidFill>
+                          <a:latin typeface="Arial"/>
+                        </a:rPr>
+                        <a:t>Cmax (mg/L)</a:t>
+                      </a:r>
+                    </a:p>
+                  </a:txBody>
+                  <a:tcPr>
+                    <a:lnL w="9525">
+                      <a:solidFill>
+                        <a:srgbClr val="5F6368"/>
+                      </a:solidFill>
+                    </a:lnL>
+                    <a:lnR w="9525">
+                      <a:solidFill>
+                        <a:srgbClr val="5F6368"/>
+                      </a:solidFill>
+                    </a:lnR>
+                    <a:lnT w="9525">
+                      <a:solidFill>
+                        <a:srgbClr val="5F6368"/>
+                      </a:solidFill>
+                    </a:lnT>
+                    <a:lnB w="9525">
+                      <a:solidFill>
+                        <a:srgbClr val="5F6368"/>
+                      </a:solidFill>
+                    </a:lnB>
+                    <a:solidFill>
+                      <a:srgbClr val="2457A6"/>
+                    </a:solidFill>
+                  </a:tcPr>
+                </a:tc>
+                <a:tc>
+                  <a:txBody>
+                    <a:bodyPr/>
+                    <a:lstStyle/>
+                    <a:p>
+                      <a:r>
+                        <a:rPr sz="1300" b="1" i="0">
+                          <a:solidFill>
+                            <a:srgbClr val="FFFFFF"/>
+                          </a:solidFill>
+                          <a:latin typeface="Arial"/>
+                        </a:rPr>
+                        <a:t>Tmax (hr)</a:t>
+                      </a:r>
+                    </a:p>
+                  </a:txBody>
+                  <a:tcPr>
+                    <a:lnL w="9525">
+                      <a:solidFill>
+                        <a:srgbClr val="5F6368"/>
+                      </a:solidFill>
+                    </a:lnL>
+                    <a:lnR w="9525">
+                      <a:solidFill>
+                        <a:srgbClr val="5F6368"/>
+                      </a:solidFill>
+                    </a:lnR>
+                    <a:lnT w="9525">
+                      <a:solidFill>
+                        <a:srgbClr val="5F6368"/>
+                      </a:solidFill>
+                    </a:lnT>
+                    <a:lnB w="9525">
+                      <a:solidFill>
+                        <a:srgbClr val="5F6368"/>
+                      </a:solidFill>
+                    </a:lnB>
+                    <a:solidFill>
+                      <a:srgbClr val="2457A6"/>
+                    </a:solidFill>
+                  </a:tcPr>
+                </a:tc>
+              </a:tr>
+              <a:tr h="302455">
+                <a:tc>
+                  <a:txBody>
+                    <a:bodyPr/>
+                    <a:lstStyle/>
+                    <a:p>
+                      <a:r>
+                        <a:rPr sz="1300" b="0" i="0">
+                          <a:solidFill>
+                            <a:srgbClr val="202124"/>
+                          </a:solidFill>
+                          <a:latin typeface="Arial"/>
+                        </a:rPr>
+                        <a:t>1</a:t>
+                      </a:r>
+                    </a:p>
+                  </a:txBody>
+                  <a:tcPr>
+                    <a:lnL w="9525">
+                      <a:solidFill>
+                        <a:srgbClr val="5F6368"/>
+                      </a:solidFill>
+                    </a:lnL>
+                    <a:lnR w="9525">
+                      <a:solidFill>
+                        <a:srgbClr val="5F6368"/>
+                      </a:solidFill>
+                    </a:lnR>
+                    <a:lnT w="9525">
+                      <a:solidFill>
+                        <a:srgbClr val="5F6368"/>
+                      </a:solidFill>
+                    </a:lnT>
+                    <a:lnB w="9525">
+                      <a:solidFill>
+                        <a:srgbClr val="5F6368"/>
+                      </a:solidFill>
+                    </a:lnB>
+                    <a:solidFill>
+                      <a:srgbClr val="FFFFFF"/>
+                    </a:solidFill>
+                  </a:tcPr>
+                </a:tc>
+                <a:tc>
+                  <a:txBody>
+                    <a:bodyPr/>
+                    <a:lstStyle/>
+                    <a:p>
+                      <a:r>
+                        <a:rPr sz="1300" b="0" i="0">
+                          <a:solidFill>
+                            <a:srgbClr val="202124"/>
+                          </a:solidFill>
+                          <a:latin typeface="Arial"/>
+                        </a:rPr>
+                        <a:t>79.6</a:t>
+                      </a:r>
+                    </a:p>
+                  </a:txBody>
+                  <a:tcPr>
+                    <a:lnL w="9525">
+                      <a:solidFill>
+                        <a:srgbClr val="5F6368"/>
+                      </a:solidFill>
+                    </a:lnL>
+                    <a:lnR w="9525">
+                      <a:solidFill>
+                        <a:srgbClr val="5F6368"/>
+                      </a:solidFill>
+                    </a:lnR>
+                    <a:lnT w="9525">
+                      <a:solidFill>
+                        <a:srgbClr val="5F6368"/>
+                      </a:solidFill>
+                    </a:lnT>
+                    <a:lnB w="9525">
+                      <a:solidFill>
+                        <a:srgbClr val="5F6368"/>
+                      </a:solidFill>
+                    </a:lnB>
+                    <a:solidFill>
+                      <a:srgbClr val="FFFFFF"/>
+                    </a:solidFill>
+                  </a:tcPr>
+                </a:tc>
+                <a:tc>
+                  <a:txBody>
+                    <a:bodyPr/>
+                    <a:lstStyle/>
+                    <a:p>
+                      <a:r>
+                        <a:rPr sz="1300" b="0" i="0">
+                          <a:solidFill>
+                            <a:srgbClr val="202124"/>
+                          </a:solidFill>
+                          <a:latin typeface="Arial"/>
+                        </a:rPr>
+                        <a:t>4.02</a:t>
+                      </a:r>
+                    </a:p>
+                  </a:txBody>
+                  <a:tcPr>
+                    <a:lnL w="9525">
+                      <a:solidFill>
+                        <a:srgbClr val="5F6368"/>
+                      </a:solidFill>
+                    </a:lnL>
+                    <a:lnR w="9525">
+                      <a:solidFill>
+                        <a:srgbClr val="5F6368"/>
+                      </a:solidFill>
+                    </a:lnR>
+                    <a:lnT w="9525">
+                      <a:solidFill>
+                        <a:srgbClr val="5F6368"/>
+                      </a:solidFill>
+                    </a:lnT>
+                    <a:lnB w="9525">
+                      <a:solidFill>
+                        <a:srgbClr val="5F6368"/>
+                      </a:solidFill>
+                    </a:lnB>
+                    <a:solidFill>
+                      <a:srgbClr val="FFFFFF"/>
+                    </a:solidFill>
+                  </a:tcPr>
+                </a:tc>
+                <a:tc>
+                  <a:txBody>
+                    <a:bodyPr/>
+                    <a:lstStyle/>
+                    <a:p>
+                      <a:r>
+                        <a:rPr sz="1300" b="0" i="0">
+                          <a:solidFill>
+                            <a:srgbClr val="202124"/>
+                          </a:solidFill>
+                          <a:latin typeface="Arial"/>
+                        </a:rPr>
+                        <a:t>10.50</a:t>
+                      </a:r>
+                    </a:p>
+                  </a:txBody>
+                  <a:tcPr>
+                    <a:lnL w="9525">
+                      <a:solidFill>
+                        <a:srgbClr val="5F6368"/>
+                      </a:solidFill>
+                    </a:lnL>
+                    <a:lnR w="9525">
+                      <a:solidFill>
+                        <a:srgbClr val="5F6368"/>
+                      </a:solidFill>
+                    </a:lnR>
+                    <a:lnT w="9525">
+                      <a:solidFill>
+                        <a:srgbClr val="5F6368"/>
+                      </a:solidFill>
+                    </a:lnT>
+                    <a:lnB w="9525">
+                      <a:solidFill>
+                        <a:srgbClr val="5F6368"/>
+                      </a:solidFill>
+                    </a:lnB>
+                    <a:solidFill>
+                      <a:srgbClr val="FFFFFF"/>
+                    </a:solidFill>
+                  </a:tcPr>
+                </a:tc>
+                <a:tc>
+                  <a:txBody>
+                    <a:bodyPr/>
+                    <a:lstStyle/>
+                    <a:p>
+                      <a:r>
+                        <a:rPr sz="1300" b="0" i="0">
+                          <a:solidFill>
+                            <a:srgbClr val="202124"/>
+                          </a:solidFill>
+                          <a:latin typeface="Arial"/>
+                        </a:rPr>
+                        <a:t>1.12</a:t>
+                      </a:r>
+                    </a:p>
+                  </a:txBody>
+                  <a:tcPr>
+                    <a:lnL w="9525">
+                      <a:solidFill>
+                        <a:srgbClr val="5F6368"/>
+                      </a:solidFill>
+                    </a:lnL>
+                    <a:lnR w="9525">
+                      <a:solidFill>
+                        <a:srgbClr val="5F6368"/>
+                      </a:solidFill>
+                    </a:lnR>
+                    <a:lnT w="9525">
+                      <a:solidFill>
+                        <a:srgbClr val="5F6368"/>
+                      </a:solidFill>
+                    </a:lnT>
+                    <a:lnB w="9525">
+                      <a:solidFill>
+                        <a:srgbClr val="5F6368"/>
+                      </a:solidFill>
+                    </a:lnB>
+                    <a:solidFill>
+                      <a:srgbClr val="FFFFFF"/>
+                    </a:solidFill>
+                  </a:tcPr>
+                </a:tc>
+              </a:tr>
+              <a:tr h="302455">
+                <a:tc>
+                  <a:txBody>
+                    <a:bodyPr/>
+                    <a:lstStyle/>
+                    <a:p>
+                      <a:r>
+                        <a:rPr sz="1300" b="0" i="0">
+                          <a:solidFill>
+                            <a:srgbClr val="202124"/>
+                          </a:solidFill>
+                          <a:latin typeface="Arial"/>
+                        </a:rPr>
+                        <a:t>2</a:t>
+                      </a:r>
+                    </a:p>
+                  </a:txBody>
+                  <a:tcPr>
+                    <a:lnL w="9525">
+                      <a:solidFill>
+                        <a:srgbClr val="5F6368"/>
+                      </a:solidFill>
+                    </a:lnL>
+                    <a:lnR w="9525">
+                      <a:solidFill>
+                        <a:srgbClr val="5F6368"/>
+                      </a:solidFill>
+                    </a:lnR>
+                    <a:lnT w="9525">
+                      <a:solidFill>
+                        <a:srgbClr val="5F6368"/>
+                      </a:solidFill>
+                    </a:lnT>
+                    <a:lnB w="9525">
+                      <a:solidFill>
+                        <a:srgbClr val="5F6368"/>
+                      </a:solidFill>
+                    </a:lnB>
+                    <a:solidFill>
+                      <a:srgbClr val="E8EFFA"/>
+                    </a:solidFill>
+                  </a:tcPr>
+                </a:tc>
+                <a:tc>
+                  <a:txBody>
+                    <a:bodyPr/>
+                    <a:lstStyle/>
+                    <a:p>
+                      <a:r>
+                        <a:rPr sz="1300" b="0" i="0">
+                          <a:solidFill>
+                            <a:srgbClr val="202124"/>
+                          </a:solidFill>
+                          <a:latin typeface="Arial"/>
+                        </a:rPr>
+                        <a:t>72.4</a:t>
+                      </a:r>
+                    </a:p>
+                  </a:txBody>
+                  <a:tcPr>
+                    <a:lnL w="9525">
+                      <a:solidFill>
+                        <a:srgbClr val="5F6368"/>
+                      </a:solidFill>
+                    </a:lnL>
+                    <a:lnR w="9525">
+                      <a:solidFill>
+                        <a:srgbClr val="5F6368"/>
+                      </a:solidFill>
+                    </a:lnR>
+                    <a:lnT w="9525">
+                      <a:solidFill>
+                        <a:srgbClr val="5F6368"/>
+                      </a:solidFill>
+                    </a:lnT>
+                    <a:lnB w="9525">
+                      <a:solidFill>
+                        <a:srgbClr val="5F6368"/>
+                      </a:solidFill>
+                    </a:lnB>
+                    <a:solidFill>
+                      <a:srgbClr val="E8EFFA"/>
+                    </a:solidFill>
+                  </a:tcPr>
+                </a:tc>
+                <a:tc>
+                  <a:txBody>
+                    <a:bodyPr/>
+                    <a:lstStyle/>
+                    <a:p>
+                      <a:r>
+                        <a:rPr sz="1300" b="0" i="0">
+                          <a:solidFill>
+                            <a:srgbClr val="202124"/>
+                          </a:solidFill>
+                          <a:latin typeface="Arial"/>
+                        </a:rPr>
+                        <a:t>4.40</a:t>
+                      </a:r>
+                    </a:p>
+                  </a:txBody>
+                  <a:tcPr>
+                    <a:lnL w="9525">
+                      <a:solidFill>
+                        <a:srgbClr val="5F6368"/>
+                      </a:solidFill>
+                    </a:lnL>
+                    <a:lnR w="9525">
+                      <a:solidFill>
+                        <a:srgbClr val="5F6368"/>
+                      </a:solidFill>
+                    </a:lnR>
+                    <a:lnT w="9525">
+                      <a:solidFill>
+                        <a:srgbClr val="5F6368"/>
+                      </a:solidFill>
+                    </a:lnT>
+                    <a:lnB w="9525">
+                      <a:solidFill>
+                        <a:srgbClr val="5F6368"/>
+                      </a:solidFill>
+                    </a:lnB>
+                    <a:solidFill>
+                      <a:srgbClr val="E8EFFA"/>
+                    </a:solidFill>
+                  </a:tcPr>
+                </a:tc>
+                <a:tc>
+                  <a:txBody>
+                    <a:bodyPr/>
+                    <a:lstStyle/>
+                    <a:p>
+                      <a:r>
+                        <a:rPr sz="1300" b="0" i="0">
+                          <a:solidFill>
+                            <a:srgbClr val="202124"/>
+                          </a:solidFill>
+                          <a:latin typeface="Arial"/>
+                        </a:rPr>
+                        <a:t>8.33</a:t>
+                      </a:r>
+                    </a:p>
+                  </a:txBody>
+                  <a:tcPr>
+                    <a:lnL w="9525">
+                      <a:solidFill>
+                        <a:srgbClr val="5F6368"/>
+                      </a:solidFill>
+                    </a:lnL>
+                    <a:lnR w="9525">
+                      <a:solidFill>
+                        <a:srgbClr val="5F6368"/>
+                      </a:solidFill>
+                    </a:lnR>
+                    <a:lnT w="9525">
+                      <a:solidFill>
+                        <a:srgbClr val="5F6368"/>
+                      </a:solidFill>
+                    </a:lnT>
+                    <a:lnB w="9525">
+                      <a:solidFill>
+                        <a:srgbClr val="5F6368"/>
+                      </a:solidFill>
+                    </a:lnB>
+                    <a:solidFill>
+                      <a:srgbClr val="E8EFFA"/>
+                    </a:solidFill>
+                  </a:tcPr>
+                </a:tc>
+                <a:tc>
+                  <a:txBody>
+                    <a:bodyPr/>
+                    <a:lstStyle/>
+                    <a:p>
+                      <a:r>
+                        <a:rPr sz="1300" b="0" i="0">
+                          <a:solidFill>
+                            <a:srgbClr val="202124"/>
+                          </a:solidFill>
+                          <a:latin typeface="Arial"/>
+                        </a:rPr>
+                        <a:t>1.92</a:t>
+                      </a:r>
+                    </a:p>
+                  </a:txBody>
+                  <a:tcPr>
+                    <a:lnL w="9525">
+                      <a:solidFill>
+                        <a:srgbClr val="5F6368"/>
+                      </a:solidFill>
+                    </a:lnL>
+                    <a:lnR w="9525">
+                      <a:solidFill>
+                        <a:srgbClr val="5F6368"/>
+                      </a:solidFill>
+                    </a:lnR>
+                    <a:lnT w="9525">
+                      <a:solidFill>
+                        <a:srgbClr val="5F6368"/>
+                      </a:solidFill>
+                    </a:lnT>
+                    <a:lnB w="9525">
+                      <a:solidFill>
+                        <a:srgbClr val="5F6368"/>
+                      </a:solidFill>
+                    </a:lnB>
+                    <a:solidFill>
+                      <a:srgbClr val="E8EFFA"/>
+                    </a:solidFill>
+                  </a:tcPr>
+                </a:tc>
+              </a:tr>
+              <a:tr h="302455">
+                <a:tc>
+                  <a:txBody>
+                    <a:bodyPr/>
+                    <a:lstStyle/>
+                    <a:p>
+                      <a:r>
+                        <a:rPr sz="1300" b="0" i="0">
+                          <a:solidFill>
+                            <a:srgbClr val="202124"/>
+                          </a:solidFill>
+                          <a:latin typeface="Arial"/>
+                        </a:rPr>
+                        <a:t>3</a:t>
+                      </a:r>
+                    </a:p>
+                  </a:txBody>
+                  <a:tcPr>
+                    <a:lnL w="9525">
+                      <a:solidFill>
+                        <a:srgbClr val="5F6368"/>
+                      </a:solidFill>
+                    </a:lnL>
+                    <a:lnR w="9525">
+                      <a:solidFill>
+                        <a:srgbClr val="5F6368"/>
+                      </a:solidFill>
+                    </a:lnR>
+                    <a:lnT w="9525">
+                      <a:solidFill>
+                        <a:srgbClr val="5F6368"/>
+                      </a:solidFill>
+                    </a:lnT>
+                    <a:lnB w="9525">
+                      <a:solidFill>
+                        <a:srgbClr val="5F6368"/>
+                      </a:solidFill>
+                    </a:lnB>
+                    <a:solidFill>
+                      <a:srgbClr val="FFFFFF"/>
+                    </a:solidFill>
+                  </a:tcPr>
+                </a:tc>
+                <a:tc>
+                  <a:txBody>
+                    <a:bodyPr/>
+                    <a:lstStyle/>
+                    <a:p>
+                      <a:r>
+                        <a:rPr sz="1300" b="0" i="0">
+                          <a:solidFill>
+                            <a:srgbClr val="202124"/>
+                          </a:solidFill>
+                          <a:latin typeface="Arial"/>
+                        </a:rPr>
+                        <a:t>70.5</a:t>
+                      </a:r>
+                    </a:p>
+                  </a:txBody>
+                  <a:tcPr>
+                    <a:lnL w="9525">
+                      <a:solidFill>
+                        <a:srgbClr val="5F6368"/>
+                      </a:solidFill>
+                    </a:lnL>
+                    <a:lnR w="9525">
+                      <a:solidFill>
+                        <a:srgbClr val="5F6368"/>
+                      </a:solidFill>
+                    </a:lnR>
+                    <a:lnT w="9525">
+                      <a:solidFill>
+                        <a:srgbClr val="5F6368"/>
+                      </a:solidFill>
+                    </a:lnT>
+                    <a:lnB w="9525">
+                      <a:solidFill>
+                        <a:srgbClr val="5F6368"/>
+                      </a:solidFill>
+                    </a:lnB>
+                    <a:solidFill>
+                      <a:srgbClr val="FFFFFF"/>
+                    </a:solidFill>
+                  </a:tcPr>
+                </a:tc>
+                <a:tc>
+                  <a:txBody>
+                    <a:bodyPr/>
+                    <a:lstStyle/>
+                    <a:p>
+                      <a:r>
+                        <a:rPr sz="1300" b="0" i="0">
+                          <a:solidFill>
+                            <a:srgbClr val="202124"/>
+                          </a:solidFill>
+                          <a:latin typeface="Arial"/>
+                        </a:rPr>
+                        <a:t>4.53</a:t>
+                      </a:r>
+                    </a:p>
+                  </a:txBody>
+                  <a:tcPr>
+                    <a:lnL w="9525">
+                      <a:solidFill>
+                        <a:srgbClr val="5F6368"/>
+                      </a:solidFill>
+                    </a:lnL>
+                    <a:lnR w="9525">
+                      <a:solidFill>
+                        <a:srgbClr val="5F6368"/>
+                      </a:solidFill>
+                    </a:lnR>
+                    <a:lnT w="9525">
+                      <a:solidFill>
+                        <a:srgbClr val="5F6368"/>
+                      </a:solidFill>
+                    </a:lnT>
+                    <a:lnB w="9525">
+                      <a:solidFill>
+                        <a:srgbClr val="5F6368"/>
+                      </a:solidFill>
+                    </a:lnB>
+                    <a:solidFill>
+                      <a:srgbClr val="FFFFFF"/>
+                    </a:solidFill>
+                  </a:tcPr>
+                </a:tc>
+                <a:tc>
+                  <a:txBody>
+                    <a:bodyPr/>
+                    <a:lstStyle/>
+                    <a:p>
+                      <a:r>
+                        <a:rPr sz="1300" b="0" i="0">
+                          <a:solidFill>
+                            <a:srgbClr val="202124"/>
+                          </a:solidFill>
+                          <a:latin typeface="Arial"/>
+                        </a:rPr>
+                        <a:t>8.20</a:t>
+                      </a:r>
+                    </a:p>
+                  </a:txBody>
+                  <a:tcPr>
+                    <a:lnL w="9525">
+                      <a:solidFill>
+                        <a:srgbClr val="5F6368"/>
+                      </a:solidFill>
+                    </a:lnL>
+                    <a:lnR w="9525">
+                      <a:solidFill>
+                        <a:srgbClr val="5F6368"/>
+                      </a:solidFill>
+                    </a:lnR>
+                    <a:lnT w="9525">
+                      <a:solidFill>
+                        <a:srgbClr val="5F6368"/>
+                      </a:solidFill>
+                    </a:lnT>
+                    <a:lnB w="9525">
+                      <a:solidFill>
+                        <a:srgbClr val="5F6368"/>
+                      </a:solidFill>
+                    </a:lnB>
+                    <a:solidFill>
+                      <a:srgbClr val="FFFFFF"/>
+                    </a:solidFill>
+                  </a:tcPr>
+                </a:tc>
+                <a:tc>
+                  <a:txBody>
+                    <a:bodyPr/>
+                    <a:lstStyle/>
+                    <a:p>
+                      <a:r>
+                        <a:rPr sz="1300" b="0" i="0">
+                          <a:solidFill>
+                            <a:srgbClr val="202124"/>
+                          </a:solidFill>
+                          <a:latin typeface="Arial"/>
+                        </a:rPr>
+                        <a:t>1.02</a:t>
+                      </a:r>
+                    </a:p>
+                  </a:txBody>
+                  <a:tcPr>
+                    <a:lnL w="9525">
+                      <a:solidFill>
+                        <a:srgbClr val="5F6368"/>
+                      </a:solidFill>
+                    </a:lnL>
+                    <a:lnR w="9525">
+                      <a:solidFill>
+                        <a:srgbClr val="5F6368"/>
+                      </a:solidFill>
+                    </a:lnR>
+                    <a:lnT w="9525">
+                      <a:solidFill>
+                        <a:srgbClr val="5F6368"/>
+                      </a:solidFill>
+                    </a:lnT>
+                    <a:lnB w="9525">
+                      <a:solidFill>
+                        <a:srgbClr val="5F6368"/>
+                      </a:solidFill>
+                    </a:lnB>
+                    <a:solidFill>
+                      <a:srgbClr val="FFFFFF"/>
+                    </a:solidFill>
+                  </a:tcPr>
+                </a:tc>
+              </a:tr>
+              <a:tr h="302455">
+                <a:tc>
+                  <a:txBody>
+                    <a:bodyPr/>
+                    <a:lstStyle/>
+                    <a:p>
+                      <a:r>
+                        <a:rPr sz="1300" b="0" i="0">
+                          <a:solidFill>
+                            <a:srgbClr val="202124"/>
+                          </a:solidFill>
+                          <a:latin typeface="Arial"/>
+                        </a:rPr>
+                        <a:t>4</a:t>
+                      </a:r>
+                    </a:p>
+                  </a:txBody>
+                  <a:tcPr>
+                    <a:lnL w="9525">
+                      <a:solidFill>
+                        <a:srgbClr val="5F6368"/>
+                      </a:solidFill>
+                    </a:lnL>
+                    <a:lnR w="9525">
+                      <a:solidFill>
+                        <a:srgbClr val="5F6368"/>
+                      </a:solidFill>
+                    </a:lnR>
+                    <a:lnT w="9525">
+                      <a:solidFill>
+                        <a:srgbClr val="5F6368"/>
+                      </a:solidFill>
+                    </a:lnT>
+                    <a:lnB w="9525">
+                      <a:solidFill>
+                        <a:srgbClr val="5F6368"/>
+                      </a:solidFill>
+                    </a:lnB>
+                    <a:solidFill>
+                      <a:srgbClr val="E8EFFA"/>
+                    </a:solidFill>
+                  </a:tcPr>
+                </a:tc>
+                <a:tc>
+                  <a:txBody>
+                    <a:bodyPr/>
+                    <a:lstStyle/>
+                    <a:p>
+                      <a:r>
+                        <a:rPr sz="1300" b="0" i="0">
+                          <a:solidFill>
+                            <a:srgbClr val="202124"/>
+                          </a:solidFill>
+                          <a:latin typeface="Arial"/>
+                        </a:rPr>
+                        <a:t>72.7</a:t>
+                      </a:r>
+                    </a:p>
+                  </a:txBody>
+                  <a:tcPr>
+                    <a:lnL w="9525">
+                      <a:solidFill>
+                        <a:srgbClr val="5F6368"/>
+                      </a:solidFill>
+                    </a:lnL>
+                    <a:lnR w="9525">
+                      <a:solidFill>
+                        <a:srgbClr val="5F6368"/>
+                      </a:solidFill>
+                    </a:lnR>
+                    <a:lnT w="9525">
+                      <a:solidFill>
+                        <a:srgbClr val="5F6368"/>
+                      </a:solidFill>
+                    </a:lnT>
+                    <a:lnB w="9525">
+                      <a:solidFill>
+                        <a:srgbClr val="5F6368"/>
+                      </a:solidFill>
+                    </a:lnB>
+                    <a:solidFill>
+                      <a:srgbClr val="E8EFFA"/>
+                    </a:solidFill>
+                  </a:tcPr>
+                </a:tc>
+                <a:tc>
+                  <a:txBody>
+                    <a:bodyPr/>
+                    <a:lstStyle/>
+                    <a:p>
+                      <a:r>
+                        <a:rPr sz="1300" b="0" i="0">
+                          <a:solidFill>
+                            <a:srgbClr val="202124"/>
+                          </a:solidFill>
+                          <a:latin typeface="Arial"/>
+                        </a:rPr>
+                        <a:t>4.40</a:t>
+                      </a:r>
+                    </a:p>
+                  </a:txBody>
+                  <a:tcPr>
+                    <a:lnL w="9525">
+                      <a:solidFill>
+                        <a:srgbClr val="5F6368"/>
+                      </a:solidFill>
+                    </a:lnL>
+                    <a:lnR w="9525">
+                      <a:solidFill>
+                        <a:srgbClr val="5F6368"/>
+                      </a:solidFill>
+                    </a:lnR>
+                    <a:lnT w="9525">
+                      <a:solidFill>
+                        <a:srgbClr val="5F6368"/>
+                      </a:solidFill>
+                    </a:lnT>
+                    <a:lnB w="9525">
+                      <a:solidFill>
+                        <a:srgbClr val="5F6368"/>
+                      </a:solidFill>
+                    </a:lnB>
+                    <a:solidFill>
+                      <a:srgbClr val="E8EFFA"/>
+                    </a:solidFill>
+                  </a:tcPr>
+                </a:tc>
+                <a:tc>
+                  <a:txBody>
+                    <a:bodyPr/>
+                    <a:lstStyle/>
+                    <a:p>
+                      <a:r>
+                        <a:rPr sz="1300" b="0" i="0">
+                          <a:solidFill>
+                            <a:srgbClr val="202124"/>
+                          </a:solidFill>
+                          <a:latin typeface="Arial"/>
+                        </a:rPr>
+                        <a:t>8.60</a:t>
+                      </a:r>
+                    </a:p>
+                  </a:txBody>
+                  <a:tcPr>
+                    <a:lnL w="9525">
+                      <a:solidFill>
+                        <a:srgbClr val="5F6368"/>
+                      </a:solidFill>
+                    </a:lnL>
+                    <a:lnR w="9525">
+                      <a:solidFill>
+                        <a:srgbClr val="5F6368"/>
+                      </a:solidFill>
+                    </a:lnR>
+                    <a:lnT w="9525">
+                      <a:solidFill>
+                        <a:srgbClr val="5F6368"/>
+                      </a:solidFill>
+                    </a:lnT>
+                    <a:lnB w="9525">
+                      <a:solidFill>
+                        <a:srgbClr val="5F6368"/>
+                      </a:solidFill>
+                    </a:lnB>
+                    <a:solidFill>
+                      <a:srgbClr val="E8EFFA"/>
+                    </a:solidFill>
+                  </a:tcPr>
+                </a:tc>
+                <a:tc>
+                  <a:txBody>
+                    <a:bodyPr/>
+                    <a:lstStyle/>
+                    <a:p>
+                      <a:r>
+                        <a:rPr sz="1300" b="0" i="0">
+                          <a:solidFill>
+                            <a:srgbClr val="202124"/>
+                          </a:solidFill>
+                          <a:latin typeface="Arial"/>
+                        </a:rPr>
+                        <a:t>1.07</a:t>
+                      </a:r>
+                    </a:p>
+                  </a:txBody>
+                  <a:tcPr>
+                    <a:lnL w="9525">
+                      <a:solidFill>
+                        <a:srgbClr val="5F6368"/>
+                      </a:solidFill>
+                    </a:lnL>
+                    <a:lnR w="9525">
+                      <a:solidFill>
+                        <a:srgbClr val="5F6368"/>
+                      </a:solidFill>
+                    </a:lnR>
+                    <a:lnT w="9525">
+                      <a:solidFill>
+                        <a:srgbClr val="5F6368"/>
+                      </a:solidFill>
+                    </a:lnT>
+                    <a:lnB w="9525">
+                      <a:solidFill>
+                        <a:srgbClr val="5F6368"/>
+                      </a:solidFill>
+                    </a:lnB>
+                    <a:solidFill>
+                      <a:srgbClr val="E8EFFA"/>
+                    </a:solidFill>
+                  </a:tcPr>
+                </a:tc>
+              </a:tr>
+              <a:tr h="302455">
+                <a:tc>
+                  <a:txBody>
+                    <a:bodyPr/>
+                    <a:lstStyle/>
+                    <a:p>
+                      <a:r>
+                        <a:rPr sz="1300" b="0" i="0">
+                          <a:solidFill>
+                            <a:srgbClr val="202124"/>
+                          </a:solidFill>
+                          <a:latin typeface="Arial"/>
+                        </a:rPr>
+                        <a:t>5</a:t>
+                      </a:r>
+                    </a:p>
+                  </a:txBody>
+                  <a:tcPr>
+                    <a:lnL w="9525">
+                      <a:solidFill>
+                        <a:srgbClr val="5F6368"/>
+                      </a:solidFill>
+                    </a:lnL>
+                    <a:lnR w="9525">
+                      <a:solidFill>
+                        <a:srgbClr val="5F6368"/>
+                      </a:solidFill>
+                    </a:lnR>
+                    <a:lnT w="9525">
+                      <a:solidFill>
+                        <a:srgbClr val="5F6368"/>
+                      </a:solidFill>
+                    </a:lnT>
+                    <a:lnB w="9525">
+                      <a:solidFill>
+                        <a:srgbClr val="5F6368"/>
+                      </a:solidFill>
+                    </a:lnB>
+                    <a:solidFill>
+                      <a:srgbClr val="FFFFFF"/>
+                    </a:solidFill>
+                  </a:tcPr>
+                </a:tc>
+                <a:tc>
+                  <a:txBody>
+                    <a:bodyPr/>
+                    <a:lstStyle/>
+                    <a:p>
+                      <a:r>
+                        <a:rPr sz="1300" b="0" i="0">
+                          <a:solidFill>
+                            <a:srgbClr val="202124"/>
+                          </a:solidFill>
+                          <a:latin typeface="Arial"/>
+                        </a:rPr>
+                        <a:t>54.6</a:t>
+                      </a:r>
+                    </a:p>
+                  </a:txBody>
+                  <a:tcPr>
+                    <a:lnL w="9525">
+                      <a:solidFill>
+                        <a:srgbClr val="5F6368"/>
+                      </a:solidFill>
+                    </a:lnL>
+                    <a:lnR w="9525">
+                      <a:solidFill>
+                        <a:srgbClr val="5F6368"/>
+                      </a:solidFill>
+                    </a:lnR>
+                    <a:lnT w="9525">
+                      <a:solidFill>
+                        <a:srgbClr val="5F6368"/>
+                      </a:solidFill>
+                    </a:lnT>
+                    <a:lnB w="9525">
+                      <a:solidFill>
+                        <a:srgbClr val="5F6368"/>
+                      </a:solidFill>
+                    </a:lnB>
+                    <a:solidFill>
+                      <a:srgbClr val="FFFFFF"/>
+                    </a:solidFill>
+                  </a:tcPr>
+                </a:tc>
+                <a:tc>
+                  <a:txBody>
+                    <a:bodyPr/>
+                    <a:lstStyle/>
+                    <a:p>
+                      <a:r>
+                        <a:rPr sz="1300" b="0" i="0">
+                          <a:solidFill>
+                            <a:srgbClr val="202124"/>
+                          </a:solidFill>
+                          <a:latin typeface="Arial"/>
+                        </a:rPr>
+                        <a:t>5.86</a:t>
+                      </a:r>
+                    </a:p>
+                  </a:txBody>
+                  <a:tcPr>
+                    <a:lnL w="9525">
+                      <a:solidFill>
+                        <a:srgbClr val="5F6368"/>
+                      </a:solidFill>
+                    </a:lnL>
+                    <a:lnR w="9525">
+                      <a:solidFill>
+                        <a:srgbClr val="5F6368"/>
+                      </a:solidFill>
+                    </a:lnR>
+                    <a:lnT w="9525">
+                      <a:solidFill>
+                        <a:srgbClr val="5F6368"/>
+                      </a:solidFill>
+                    </a:lnT>
+                    <a:lnB w="9525">
+                      <a:solidFill>
+                        <a:srgbClr val="5F6368"/>
+                      </a:solidFill>
+                    </a:lnB>
+                    <a:solidFill>
+                      <a:srgbClr val="FFFFFF"/>
+                    </a:solidFill>
+                  </a:tcPr>
+                </a:tc>
+                <a:tc>
+                  <a:txBody>
+                    <a:bodyPr/>
+                    <a:lstStyle/>
+                    <a:p>
+                      <a:r>
+                        <a:rPr sz="1300" b="0" i="0">
+                          <a:solidFill>
+                            <a:srgbClr val="202124"/>
+                          </a:solidFill>
+                          <a:latin typeface="Arial"/>
+                        </a:rPr>
+                        <a:t>11.40</a:t>
+                      </a:r>
+                    </a:p>
+                  </a:txBody>
+                  <a:tcPr>
+                    <a:lnL w="9525">
+                      <a:solidFill>
+                        <a:srgbClr val="5F6368"/>
+                      </a:solidFill>
+                    </a:lnL>
+                    <a:lnR w="9525">
+                      <a:solidFill>
+                        <a:srgbClr val="5F6368"/>
+                      </a:solidFill>
+                    </a:lnR>
+                    <a:lnT w="9525">
+                      <a:solidFill>
+                        <a:srgbClr val="5F6368"/>
+                      </a:solidFill>
+                    </a:lnT>
+                    <a:lnB w="9525">
+                      <a:solidFill>
+                        <a:srgbClr val="5F6368"/>
+                      </a:solidFill>
+                    </a:lnB>
+                    <a:solidFill>
+                      <a:srgbClr val="FFFFFF"/>
+                    </a:solidFill>
+                  </a:tcPr>
+                </a:tc>
+                <a:tc>
+                  <a:txBody>
+                    <a:bodyPr/>
+                    <a:lstStyle/>
+                    <a:p>
+                      <a:r>
+                        <a:rPr sz="1300" b="0" i="0">
+                          <a:solidFill>
+                            <a:srgbClr val="202124"/>
+                          </a:solidFill>
+                          <a:latin typeface="Arial"/>
+                        </a:rPr>
+                        <a:t>1.00</a:t>
+                      </a:r>
+                    </a:p>
+                  </a:txBody>
+                  <a:tcPr>
+                    <a:lnL w="9525">
+                      <a:solidFill>
+                        <a:srgbClr val="5F6368"/>
+                      </a:solidFill>
+                    </a:lnL>
+                    <a:lnR w="9525">
+                      <a:solidFill>
+                        <a:srgbClr val="5F6368"/>
+                      </a:solidFill>
+                    </a:lnR>
+                    <a:lnT w="9525">
+                      <a:solidFill>
+                        <a:srgbClr val="5F6368"/>
+                      </a:solidFill>
+                    </a:lnT>
+                    <a:lnB w="9525">
+                      <a:solidFill>
+                        <a:srgbClr val="5F6368"/>
+                      </a:solidFill>
+                    </a:lnB>
+                    <a:solidFill>
+                      <a:srgbClr val="FFFFFF"/>
+                    </a:solidFill>
+                  </a:tcPr>
+                </a:tc>
+              </a:tr>
+              <a:tr h="302455">
+                <a:tc>
+                  <a:txBody>
+                    <a:bodyPr/>
+                    <a:lstStyle/>
+                    <a:p>
+                      <a:r>
+                        <a:rPr sz="1300" b="0" i="0">
+                          <a:solidFill>
+                            <a:srgbClr val="202124"/>
+                          </a:solidFill>
+                          <a:latin typeface="Arial"/>
+                        </a:rPr>
+                        <a:t>6</a:t>
+                      </a:r>
+                    </a:p>
+                  </a:txBody>
+                  <a:tcPr>
+                    <a:lnL w="9525">
+                      <a:solidFill>
+                        <a:srgbClr val="5F6368"/>
+                      </a:solidFill>
+                    </a:lnL>
+                    <a:lnR w="9525">
+                      <a:solidFill>
+                        <a:srgbClr val="5F6368"/>
+                      </a:solidFill>
+                    </a:lnR>
+                    <a:lnT w="9525">
+                      <a:solidFill>
+                        <a:srgbClr val="5F6368"/>
+                      </a:solidFill>
+                    </a:lnT>
+                    <a:lnB w="9525">
+                      <a:solidFill>
+                        <a:srgbClr val="5F6368"/>
+                      </a:solidFill>
+                    </a:lnB>
+                    <a:solidFill>
+                      <a:srgbClr val="E8EFFA"/>
+                    </a:solidFill>
+                  </a:tcPr>
+                </a:tc>
+                <a:tc>
+                  <a:txBody>
+                    <a:bodyPr/>
+                    <a:lstStyle/>
+                    <a:p>
+                      <a:r>
+                        <a:rPr sz="1300" b="0" i="0">
+                          <a:solidFill>
+                            <a:srgbClr val="202124"/>
+                          </a:solidFill>
+                          <a:latin typeface="Arial"/>
+                        </a:rPr>
+                        <a:t>80.0</a:t>
+                      </a:r>
+                    </a:p>
+                  </a:txBody>
+                  <a:tcPr>
+                    <a:lnL w="9525">
+                      <a:solidFill>
+                        <a:srgbClr val="5F6368"/>
+                      </a:solidFill>
+                    </a:lnL>
+                    <a:lnR w="9525">
+                      <a:solidFill>
+                        <a:srgbClr val="5F6368"/>
+                      </a:solidFill>
+                    </a:lnR>
+                    <a:lnT w="9525">
+                      <a:solidFill>
+                        <a:srgbClr val="5F6368"/>
+                      </a:solidFill>
+                    </a:lnT>
+                    <a:lnB w="9525">
+                      <a:solidFill>
+                        <a:srgbClr val="5F6368"/>
+                      </a:solidFill>
+                    </a:lnB>
+                    <a:solidFill>
+                      <a:srgbClr val="E8EFFA"/>
+                    </a:solidFill>
+                  </a:tcPr>
+                </a:tc>
+                <a:tc>
+                  <a:txBody>
+                    <a:bodyPr/>
+                    <a:lstStyle/>
+                    <a:p>
+                      <a:r>
+                        <a:rPr sz="1300" b="0" i="0">
+                          <a:solidFill>
+                            <a:srgbClr val="202124"/>
+                          </a:solidFill>
+                          <a:latin typeface="Arial"/>
+                        </a:rPr>
+                        <a:t>4.00</a:t>
+                      </a:r>
+                    </a:p>
+                  </a:txBody>
+                  <a:tcPr>
+                    <a:lnL w="9525">
+                      <a:solidFill>
+                        <a:srgbClr val="5F6368"/>
+                      </a:solidFill>
+                    </a:lnL>
+                    <a:lnR w="9525">
+                      <a:solidFill>
+                        <a:srgbClr val="5F6368"/>
+                      </a:solidFill>
+                    </a:lnR>
+                    <a:lnT w="9525">
+                      <a:solidFill>
+                        <a:srgbClr val="5F6368"/>
+                      </a:solidFill>
+                    </a:lnT>
+                    <a:lnB w="9525">
+                      <a:solidFill>
+                        <a:srgbClr val="5F6368"/>
+                      </a:solidFill>
+                    </a:lnB>
+                    <a:solidFill>
+                      <a:srgbClr val="E8EFFA"/>
+                    </a:solidFill>
+                  </a:tcPr>
+                </a:tc>
+                <a:tc>
+                  <a:txBody>
+                    <a:bodyPr/>
+                    <a:lstStyle/>
+                    <a:p>
+                      <a:r>
+                        <a:rPr sz="1300" b="0" i="0">
+                          <a:solidFill>
+                            <a:srgbClr val="202124"/>
+                          </a:solidFill>
+                          <a:latin typeface="Arial"/>
+                        </a:rPr>
+                        <a:t>6.44</a:t>
+                      </a:r>
+                    </a:p>
+                  </a:txBody>
+                  <a:tcPr>
+                    <a:lnL w="9525">
+                      <a:solidFill>
+                        <a:srgbClr val="5F6368"/>
+                      </a:solidFill>
+                    </a:lnL>
+                    <a:lnR w="9525">
+                      <a:solidFill>
+                        <a:srgbClr val="5F6368"/>
+                      </a:solidFill>
+                    </a:lnR>
+                    <a:lnT w="9525">
+                      <a:solidFill>
+                        <a:srgbClr val="5F6368"/>
+                      </a:solidFill>
+                    </a:lnT>
+                    <a:lnB w="9525">
+                      <a:solidFill>
+                        <a:srgbClr val="5F6368"/>
+                      </a:solidFill>
+                    </a:lnB>
+                    <a:solidFill>
+                      <a:srgbClr val="E8EFFA"/>
+                    </a:solidFill>
+                  </a:tcPr>
+                </a:tc>
+                <a:tc>
+                  <a:txBody>
+                    <a:bodyPr/>
+                    <a:lstStyle/>
+                    <a:p>
+                      <a:r>
+                        <a:rPr sz="1300" b="0" i="0">
+                          <a:solidFill>
+                            <a:srgbClr val="202124"/>
+                          </a:solidFill>
+                          <a:latin typeface="Arial"/>
+                        </a:rPr>
+                        <a:t>1.15</a:t>
+                      </a:r>
+                    </a:p>
+                  </a:txBody>
+                  <a:tcPr>
+                    <a:lnL w="9525">
+                      <a:solidFill>
+                        <a:srgbClr val="5F6368"/>
+                      </a:solidFill>
+                    </a:lnL>
+                    <a:lnR w="9525">
+                      <a:solidFill>
+                        <a:srgbClr val="5F6368"/>
+                      </a:solidFill>
+                    </a:lnR>
+                    <a:lnT w="9525">
+                      <a:solidFill>
+                        <a:srgbClr val="5F6368"/>
+                      </a:solidFill>
+                    </a:lnT>
+                    <a:lnB w="9525">
+                      <a:solidFill>
+                        <a:srgbClr val="5F6368"/>
+                      </a:solidFill>
+                    </a:lnB>
+                    <a:solidFill>
+                      <a:srgbClr val="E8EFFA"/>
+                    </a:solidFill>
+                  </a:tcPr>
+                </a:tc>
+              </a:tr>
+              <a:tr h="302455">
+                <a:tc>
+                  <a:txBody>
+                    <a:bodyPr/>
+                    <a:lstStyle/>
+                    <a:p>
+                      <a:r>
+                        <a:rPr sz="1300" b="0" i="0">
+                          <a:solidFill>
+                            <a:srgbClr val="202124"/>
+                          </a:solidFill>
+                          <a:latin typeface="Arial"/>
+                        </a:rPr>
+                        <a:t>7</a:t>
+                      </a:r>
+                    </a:p>
+                  </a:txBody>
+                  <a:tcPr>
+                    <a:lnL w="9525">
+                      <a:solidFill>
+                        <a:srgbClr val="5F6368"/>
+                      </a:solidFill>
+                    </a:lnL>
+                    <a:lnR w="9525">
+                      <a:solidFill>
+                        <a:srgbClr val="5F6368"/>
+                      </a:solidFill>
+                    </a:lnR>
+                    <a:lnT w="9525">
+                      <a:solidFill>
+                        <a:srgbClr val="5F6368"/>
+                      </a:solidFill>
+                    </a:lnT>
+                    <a:lnB w="9525">
+                      <a:solidFill>
+                        <a:srgbClr val="5F6368"/>
+                      </a:solidFill>
+                    </a:lnB>
+                    <a:solidFill>
+                      <a:srgbClr val="FFFFFF"/>
+                    </a:solidFill>
+                  </a:tcPr>
+                </a:tc>
+                <a:tc>
+                  <a:txBody>
+                    <a:bodyPr/>
+                    <a:lstStyle/>
+                    <a:p>
+                      <a:r>
+                        <a:rPr sz="1300" b="0" i="0">
+                          <a:solidFill>
+                            <a:srgbClr val="202124"/>
+                          </a:solidFill>
+                          <a:latin typeface="Arial"/>
+                        </a:rPr>
+                        <a:t>64.6</a:t>
+                      </a:r>
+                    </a:p>
+                  </a:txBody>
+                  <a:tcPr>
+                    <a:lnL w="9525">
+                      <a:solidFill>
+                        <a:srgbClr val="5F6368"/>
+                      </a:solidFill>
+                    </a:lnL>
+                    <a:lnR w="9525">
+                      <a:solidFill>
+                        <a:srgbClr val="5F6368"/>
+                      </a:solidFill>
+                    </a:lnR>
+                    <a:lnT w="9525">
+                      <a:solidFill>
+                        <a:srgbClr val="5F6368"/>
+                      </a:solidFill>
+                    </a:lnT>
+                    <a:lnB w="9525">
+                      <a:solidFill>
+                        <a:srgbClr val="5F6368"/>
+                      </a:solidFill>
+                    </a:lnB>
+                    <a:solidFill>
+                      <a:srgbClr val="FFFFFF"/>
+                    </a:solidFill>
+                  </a:tcPr>
+                </a:tc>
+                <a:tc>
+                  <a:txBody>
+                    <a:bodyPr/>
+                    <a:lstStyle/>
+                    <a:p>
+                      <a:r>
+                        <a:rPr sz="1300" b="0" i="0">
+                          <a:solidFill>
+                            <a:srgbClr val="202124"/>
+                          </a:solidFill>
+                          <a:latin typeface="Arial"/>
+                        </a:rPr>
+                        <a:t>4.95</a:t>
+                      </a:r>
+                    </a:p>
+                  </a:txBody>
+                  <a:tcPr>
+                    <a:lnL w="9525">
+                      <a:solidFill>
+                        <a:srgbClr val="5F6368"/>
+                      </a:solidFill>
+                    </a:lnL>
+                    <a:lnR w="9525">
+                      <a:solidFill>
+                        <a:srgbClr val="5F6368"/>
+                      </a:solidFill>
+                    </a:lnR>
+                    <a:lnT w="9525">
+                      <a:solidFill>
+                        <a:srgbClr val="5F6368"/>
+                      </a:solidFill>
+                    </a:lnT>
+                    <a:lnB w="9525">
+                      <a:solidFill>
+                        <a:srgbClr val="5F6368"/>
+                      </a:solidFill>
+                    </a:lnB>
+                    <a:solidFill>
+                      <a:srgbClr val="FFFFFF"/>
+                    </a:solidFill>
+                  </a:tcPr>
+                </a:tc>
+                <a:tc>
+                  <a:txBody>
+                    <a:bodyPr/>
+                    <a:lstStyle/>
+                    <a:p>
+                      <a:r>
+                        <a:rPr sz="1300" b="0" i="0">
+                          <a:solidFill>
+                            <a:srgbClr val="202124"/>
+                          </a:solidFill>
+                          <a:latin typeface="Arial"/>
+                        </a:rPr>
+                        <a:t>7.09</a:t>
+                      </a:r>
+                    </a:p>
+                  </a:txBody>
+                  <a:tcPr>
+                    <a:lnL w="9525">
+                      <a:solidFill>
+                        <a:srgbClr val="5F6368"/>
+                      </a:solidFill>
+                    </a:lnL>
+                    <a:lnR w="9525">
+                      <a:solidFill>
+                        <a:srgbClr val="5F6368"/>
+                      </a:solidFill>
+                    </a:lnR>
+                    <a:lnT w="9525">
+                      <a:solidFill>
+                        <a:srgbClr val="5F6368"/>
+                      </a:solidFill>
+                    </a:lnT>
+                    <a:lnB w="9525">
+                      <a:solidFill>
+                        <a:srgbClr val="5F6368"/>
+                      </a:solidFill>
+                    </a:lnB>
+                    <a:solidFill>
+                      <a:srgbClr val="FFFFFF"/>
+                    </a:solidFill>
+                  </a:tcPr>
+                </a:tc>
+                <a:tc>
+                  <a:txBody>
+                    <a:bodyPr/>
+                    <a:lstStyle/>
+                    <a:p>
+                      <a:r>
+                        <a:rPr sz="1300" b="0" i="0">
+                          <a:solidFill>
+                            <a:srgbClr val="202124"/>
+                          </a:solidFill>
+                          <a:latin typeface="Arial"/>
+                        </a:rPr>
+                        <a:t>3.48</a:t>
+                      </a:r>
+                    </a:p>
+                  </a:txBody>
+                  <a:tcPr>
+                    <a:lnL w="9525">
+                      <a:solidFill>
+                        <a:srgbClr val="5F6368"/>
+                      </a:solidFill>
+                    </a:lnL>
+                    <a:lnR w="9525">
+                      <a:solidFill>
+                        <a:srgbClr val="5F6368"/>
+                      </a:solidFill>
+                    </a:lnR>
+                    <a:lnT w="9525">
+                      <a:solidFill>
+                        <a:srgbClr val="5F6368"/>
+                      </a:solidFill>
+                    </a:lnT>
+                    <a:lnB w="9525">
+                      <a:solidFill>
+                        <a:srgbClr val="5F6368"/>
+                      </a:solidFill>
+                    </a:lnB>
+                    <a:solidFill>
+                      <a:srgbClr val="FFFFFF"/>
+                    </a:solidFill>
+                  </a:tcPr>
+                </a:tc>
+              </a:tr>
+              <a:tr h="302455">
+                <a:tc>
+                  <a:txBody>
+                    <a:bodyPr/>
+                    <a:lstStyle/>
+                    <a:p>
+                      <a:r>
+                        <a:rPr sz="1300" b="0" i="0">
+                          <a:solidFill>
+                            <a:srgbClr val="202124"/>
+                          </a:solidFill>
+                          <a:latin typeface="Arial"/>
+                        </a:rPr>
+                        <a:t>8</a:t>
+                      </a:r>
+                    </a:p>
+                  </a:txBody>
+                  <a:tcPr>
+                    <a:lnL w="9525">
+                      <a:solidFill>
+                        <a:srgbClr val="5F6368"/>
+                      </a:solidFill>
+                    </a:lnL>
+                    <a:lnR w="9525">
+                      <a:solidFill>
+                        <a:srgbClr val="5F6368"/>
+                      </a:solidFill>
+                    </a:lnR>
+                    <a:lnT w="9525">
+                      <a:solidFill>
+                        <a:srgbClr val="5F6368"/>
+                      </a:solidFill>
+                    </a:lnT>
+                    <a:lnB w="9525">
+                      <a:solidFill>
+                        <a:srgbClr val="5F6368"/>
+                      </a:solidFill>
+                    </a:lnB>
+                    <a:solidFill>
+                      <a:srgbClr val="E8EFFA"/>
+                    </a:solidFill>
+                  </a:tcPr>
+                </a:tc>
+                <a:tc>
+                  <a:txBody>
+                    <a:bodyPr/>
+                    <a:lstStyle/>
+                    <a:p>
+                      <a:r>
+                        <a:rPr sz="1300" b="0" i="0">
+                          <a:solidFill>
+                            <a:srgbClr val="202124"/>
+                          </a:solidFill>
+                          <a:latin typeface="Arial"/>
+                        </a:rPr>
+                        <a:t>70.5</a:t>
+                      </a:r>
+                    </a:p>
+                  </a:txBody>
+                  <a:tcPr>
+                    <a:lnL w="9525">
+                      <a:solidFill>
+                        <a:srgbClr val="5F6368"/>
+                      </a:solidFill>
+                    </a:lnL>
+                    <a:lnR w="9525">
+                      <a:solidFill>
+                        <a:srgbClr val="5F6368"/>
+                      </a:solidFill>
+                    </a:lnR>
+                    <a:lnT w="9525">
+                      <a:solidFill>
+                        <a:srgbClr val="5F6368"/>
+                      </a:solidFill>
+                    </a:lnT>
+                    <a:lnB w="9525">
+                      <a:solidFill>
+                        <a:srgbClr val="5F6368"/>
+                      </a:solidFill>
+                    </a:lnB>
+                    <a:solidFill>
+                      <a:srgbClr val="E8EFFA"/>
+                    </a:solidFill>
+                  </a:tcPr>
+                </a:tc>
+                <a:tc>
+                  <a:txBody>
+                    <a:bodyPr/>
+                    <a:lstStyle/>
+                    <a:p>
+                      <a:r>
+                        <a:rPr sz="1300" b="0" i="0">
+                          <a:solidFill>
+                            <a:srgbClr val="202124"/>
+                          </a:solidFill>
+                          <a:latin typeface="Arial"/>
+                        </a:rPr>
+                        <a:t>4.53</a:t>
+                      </a:r>
+                    </a:p>
+                  </a:txBody>
+                  <a:tcPr>
+                    <a:lnL w="9525">
+                      <a:solidFill>
+                        <a:srgbClr val="5F6368"/>
+                      </a:solidFill>
+                    </a:lnL>
+                    <a:lnR w="9525">
+                      <a:solidFill>
+                        <a:srgbClr val="5F6368"/>
+                      </a:solidFill>
+                    </a:lnR>
+                    <a:lnT w="9525">
+                      <a:solidFill>
+                        <a:srgbClr val="5F6368"/>
+                      </a:solidFill>
+                    </a:lnT>
+                    <a:lnB w="9525">
+                      <a:solidFill>
+                        <a:srgbClr val="5F6368"/>
+                      </a:solidFill>
+                    </a:lnB>
+                    <a:solidFill>
+                      <a:srgbClr val="E8EFFA"/>
+                    </a:solidFill>
+                  </a:tcPr>
+                </a:tc>
+                <a:tc>
+                  <a:txBody>
+                    <a:bodyPr/>
+                    <a:lstStyle/>
+                    <a:p>
+                      <a:r>
+                        <a:rPr sz="1300" b="0" i="0">
+                          <a:solidFill>
+                            <a:srgbClr val="202124"/>
+                          </a:solidFill>
+                          <a:latin typeface="Arial"/>
+                        </a:rPr>
+                        <a:t>7.56</a:t>
+                      </a:r>
+                    </a:p>
+                  </a:txBody>
+                  <a:tcPr>
+                    <a:lnL w="9525">
+                      <a:solidFill>
+                        <a:srgbClr val="5F6368"/>
+                      </a:solidFill>
+                    </a:lnL>
+                    <a:lnR w="9525">
+                      <a:solidFill>
+                        <a:srgbClr val="5F6368"/>
+                      </a:solidFill>
+                    </a:lnR>
+                    <a:lnT w="9525">
+                      <a:solidFill>
+                        <a:srgbClr val="5F6368"/>
+                      </a:solidFill>
+                    </a:lnT>
+                    <a:lnB w="9525">
+                      <a:solidFill>
+                        <a:srgbClr val="5F6368"/>
+                      </a:solidFill>
+                    </a:lnB>
+                    <a:solidFill>
+                      <a:srgbClr val="E8EFFA"/>
+                    </a:solidFill>
+                  </a:tcPr>
+                </a:tc>
+                <a:tc>
+                  <a:txBody>
+                    <a:bodyPr/>
+                    <a:lstStyle/>
+                    <a:p>
+                      <a:r>
+                        <a:rPr sz="1300" b="0" i="0">
+                          <a:solidFill>
+                            <a:srgbClr val="202124"/>
+                          </a:solidFill>
+                          <a:latin typeface="Arial"/>
+                        </a:rPr>
+                        <a:t>2.02</a:t>
+                      </a:r>
+                    </a:p>
+                  </a:txBody>
+                  <a:tcPr>
+                    <a:lnL w="9525">
+                      <a:solidFill>
+                        <a:srgbClr val="5F6368"/>
+                      </a:solidFill>
+                    </a:lnL>
+                    <a:lnR w="9525">
+                      <a:solidFill>
+                        <a:srgbClr val="5F6368"/>
+                      </a:solidFill>
+                    </a:lnR>
+                    <a:lnT w="9525">
+                      <a:solidFill>
+                        <a:srgbClr val="5F6368"/>
+                      </a:solidFill>
+                    </a:lnT>
+                    <a:lnB w="9525">
+                      <a:solidFill>
+                        <a:srgbClr val="5F6368"/>
+                      </a:solidFill>
+                    </a:lnB>
+                    <a:solidFill>
+                      <a:srgbClr val="E8EFFA"/>
+                    </a:solidFill>
+                  </a:tcPr>
+                </a:tc>
+              </a:tr>
+              <a:tr h="302455">
+                <a:tc>
+                  <a:txBody>
+                    <a:bodyPr/>
+                    <a:lstStyle/>
+                    <a:p>
+                      <a:r>
+                        <a:rPr sz="1300" b="0" i="0">
+                          <a:solidFill>
+                            <a:srgbClr val="202124"/>
+                          </a:solidFill>
+                          <a:latin typeface="Arial"/>
+                        </a:rPr>
+                        <a:t>9</a:t>
+                      </a:r>
+                    </a:p>
+                  </a:txBody>
+                  <a:tcPr>
+                    <a:lnL w="9525">
+                      <a:solidFill>
+                        <a:srgbClr val="5F6368"/>
+                      </a:solidFill>
+                    </a:lnL>
+                    <a:lnR w="9525">
+                      <a:solidFill>
+                        <a:srgbClr val="5F6368"/>
+                      </a:solidFill>
+                    </a:lnR>
+                    <a:lnT w="9525">
+                      <a:solidFill>
+                        <a:srgbClr val="5F6368"/>
+                      </a:solidFill>
+                    </a:lnT>
+                    <a:lnB w="9525">
+                      <a:solidFill>
+                        <a:srgbClr val="5F6368"/>
+                      </a:solidFill>
+                    </a:lnB>
+                    <a:solidFill>
+                      <a:srgbClr val="FFFFFF"/>
+                    </a:solidFill>
+                  </a:tcPr>
+                </a:tc>
+                <a:tc>
+                  <a:txBody>
+                    <a:bodyPr/>
+                    <a:lstStyle/>
+                    <a:p>
+                      <a:r>
+                        <a:rPr sz="1300" b="0" i="0">
+                          <a:solidFill>
+                            <a:srgbClr val="202124"/>
+                          </a:solidFill>
+                          <a:latin typeface="Arial"/>
+                        </a:rPr>
+                        <a:t>86.4</a:t>
+                      </a:r>
+                    </a:p>
+                  </a:txBody>
+                  <a:tcPr>
+                    <a:lnL w="9525">
+                      <a:solidFill>
+                        <a:srgbClr val="5F6368"/>
+                      </a:solidFill>
+                    </a:lnL>
+                    <a:lnR w="9525">
+                      <a:solidFill>
+                        <a:srgbClr val="5F6368"/>
+                      </a:solidFill>
+                    </a:lnR>
+                    <a:lnT w="9525">
+                      <a:solidFill>
+                        <a:srgbClr val="5F6368"/>
+                      </a:solidFill>
+                    </a:lnT>
+                    <a:lnB w="9525">
+                      <a:solidFill>
+                        <a:srgbClr val="5F6368"/>
+                      </a:solidFill>
+                    </a:lnB>
+                    <a:solidFill>
+                      <a:srgbClr val="FFFFFF"/>
+                    </a:solidFill>
+                  </a:tcPr>
+                </a:tc>
+                <a:tc>
+                  <a:txBody>
+                    <a:bodyPr/>
+                    <a:lstStyle/>
+                    <a:p>
+                      <a:r>
+                        <a:rPr sz="1300" b="0" i="0">
+                          <a:solidFill>
+                            <a:srgbClr val="202124"/>
+                          </a:solidFill>
+                          <a:latin typeface="Arial"/>
+                        </a:rPr>
+                        <a:t>3.10</a:t>
+                      </a:r>
+                    </a:p>
+                  </a:txBody>
+                  <a:tcPr>
+                    <a:lnL w="9525">
+                      <a:solidFill>
+                        <a:srgbClr val="5F6368"/>
+                      </a:solidFill>
+                    </a:lnL>
+                    <a:lnR w="9525">
+                      <a:solidFill>
+                        <a:srgbClr val="5F6368"/>
+                      </a:solidFill>
+                    </a:lnR>
+                    <a:lnT w="9525">
+                      <a:solidFill>
+                        <a:srgbClr val="5F6368"/>
+                      </a:solidFill>
+                    </a:lnT>
+                    <a:lnB w="9525">
+                      <a:solidFill>
+                        <a:srgbClr val="5F6368"/>
+                      </a:solidFill>
+                    </a:lnB>
+                    <a:solidFill>
+                      <a:srgbClr val="FFFFFF"/>
+                    </a:solidFill>
+                  </a:tcPr>
+                </a:tc>
+                <a:tc>
+                  <a:txBody>
+                    <a:bodyPr/>
+                    <a:lstStyle/>
+                    <a:p>
+                      <a:r>
+                        <a:rPr sz="1300" b="0" i="0">
+                          <a:solidFill>
+                            <a:srgbClr val="202124"/>
+                          </a:solidFill>
+                          <a:latin typeface="Arial"/>
+                        </a:rPr>
+                        <a:t>9.03</a:t>
+                      </a:r>
+                    </a:p>
+                  </a:txBody>
+                  <a:tcPr>
+                    <a:lnL w="9525">
+                      <a:solidFill>
+                        <a:srgbClr val="5F6368"/>
+                      </a:solidFill>
+                    </a:lnL>
+                    <a:lnR w="9525">
+                      <a:solidFill>
+                        <a:srgbClr val="5F6368"/>
+                      </a:solidFill>
+                    </a:lnR>
+                    <a:lnT w="9525">
+                      <a:solidFill>
+                        <a:srgbClr val="5F6368"/>
+                      </a:solidFill>
+                    </a:lnT>
+                    <a:lnB w="9525">
+                      <a:solidFill>
+                        <a:srgbClr val="5F6368"/>
+                      </a:solidFill>
+                    </a:lnB>
+                    <a:solidFill>
+                      <a:srgbClr val="FFFFFF"/>
+                    </a:solidFill>
+                  </a:tcPr>
+                </a:tc>
+                <a:tc>
+                  <a:txBody>
+                    <a:bodyPr/>
+                    <a:lstStyle/>
+                    <a:p>
+                      <a:r>
+                        <a:rPr sz="1300" b="0" i="0">
+                          <a:solidFill>
+                            <a:srgbClr val="202124"/>
+                          </a:solidFill>
+                          <a:latin typeface="Arial"/>
+                        </a:rPr>
+                        <a:t>0.63</a:t>
+                      </a:r>
+                    </a:p>
+                  </a:txBody>
+                  <a:tcPr>
+                    <a:lnL w="9525">
+                      <a:solidFill>
+                        <a:srgbClr val="5F6368"/>
+                      </a:solidFill>
+                    </a:lnL>
+                    <a:lnR w="9525">
+                      <a:solidFill>
+                        <a:srgbClr val="5F6368"/>
+                      </a:solidFill>
+                    </a:lnR>
+                    <a:lnT w="9525">
+                      <a:solidFill>
+                        <a:srgbClr val="5F6368"/>
+                      </a:solidFill>
+                    </a:lnT>
+                    <a:lnB w="9525">
+                      <a:solidFill>
+                        <a:srgbClr val="5F6368"/>
+                      </a:solidFill>
+                    </a:lnB>
+                    <a:solidFill>
+                      <a:srgbClr val="FFFFFF"/>
+                    </a:solidFill>
+                  </a:tcPr>
+                </a:tc>
+              </a:tr>
+              <a:tr h="302455">
+                <a:tc>
+                  <a:txBody>
+                    <a:bodyPr/>
+                    <a:lstStyle/>
+                    <a:p>
+                      <a:r>
+                        <a:rPr sz="1300" b="0" i="0">
+                          <a:solidFill>
+                            <a:srgbClr val="202124"/>
+                          </a:solidFill>
+                          <a:latin typeface="Arial"/>
+                        </a:rPr>
+                        <a:t>10</a:t>
+                      </a:r>
+                    </a:p>
+                  </a:txBody>
+                  <a:tcPr>
+                    <a:lnL w="9525">
+                      <a:solidFill>
+                        <a:srgbClr val="5F6368"/>
+                      </a:solidFill>
+                    </a:lnL>
+                    <a:lnR w="9525">
+                      <a:solidFill>
+                        <a:srgbClr val="5F6368"/>
+                      </a:solidFill>
+                    </a:lnR>
+                    <a:lnT w="9525">
+                      <a:solidFill>
+                        <a:srgbClr val="5F6368"/>
+                      </a:solidFill>
+                    </a:lnT>
+                    <a:lnB w="9525">
+                      <a:solidFill>
+                        <a:srgbClr val="5F6368"/>
+                      </a:solidFill>
+                    </a:lnB>
+                    <a:solidFill>
+                      <a:srgbClr val="E8EFFA"/>
+                    </a:solidFill>
+                  </a:tcPr>
+                </a:tc>
+                <a:tc>
+                  <a:txBody>
+                    <a:bodyPr/>
+                    <a:lstStyle/>
+                    <a:p>
+                      <a:r>
+                        <a:rPr sz="1300" b="0" i="0">
+                          <a:solidFill>
+                            <a:srgbClr val="202124"/>
+                          </a:solidFill>
+                          <a:latin typeface="Arial"/>
+                        </a:rPr>
+                        <a:t>58.2</a:t>
+                      </a:r>
+                    </a:p>
+                  </a:txBody>
+                  <a:tcPr>
+                    <a:lnL w="9525">
+                      <a:solidFill>
+                        <a:srgbClr val="5F6368"/>
+                      </a:solidFill>
+                    </a:lnL>
+                    <a:lnR w="9525">
+                      <a:solidFill>
+                        <a:srgbClr val="5F6368"/>
+                      </a:solidFill>
+                    </a:lnR>
+                    <a:lnT w="9525">
+                      <a:solidFill>
+                        <a:srgbClr val="5F6368"/>
+                      </a:solidFill>
+                    </a:lnT>
+                    <a:lnB w="9525">
+                      <a:solidFill>
+                        <a:srgbClr val="5F6368"/>
+                      </a:solidFill>
+                    </a:lnB>
+                    <a:solidFill>
+                      <a:srgbClr val="E8EFFA"/>
+                    </a:solidFill>
+                  </a:tcPr>
+                </a:tc>
+                <a:tc>
+                  <a:txBody>
+                    <a:bodyPr/>
+                    <a:lstStyle/>
+                    <a:p>
+                      <a:r>
+                        <a:rPr sz="1300" b="0" i="0">
+                          <a:solidFill>
+                            <a:srgbClr val="202124"/>
+                          </a:solidFill>
+                          <a:latin typeface="Arial"/>
+                        </a:rPr>
+                        <a:t>5.50</a:t>
+                      </a:r>
+                    </a:p>
+                  </a:txBody>
+                  <a:tcPr>
+                    <a:lnL w="9525">
+                      <a:solidFill>
+                        <a:srgbClr val="5F6368"/>
+                      </a:solidFill>
+                    </a:lnL>
+                    <a:lnR w="9525">
+                      <a:solidFill>
+                        <a:srgbClr val="5F6368"/>
+                      </a:solidFill>
+                    </a:lnR>
+                    <a:lnT w="9525">
+                      <a:solidFill>
+                        <a:srgbClr val="5F6368"/>
+                      </a:solidFill>
+                    </a:lnT>
+                    <a:lnB w="9525">
+                      <a:solidFill>
+                        <a:srgbClr val="5F6368"/>
+                      </a:solidFill>
+                    </a:lnB>
+                    <a:solidFill>
+                      <a:srgbClr val="E8EFFA"/>
+                    </a:solidFill>
+                  </a:tcPr>
+                </a:tc>
+                <a:tc>
+                  <a:txBody>
+                    <a:bodyPr/>
+                    <a:lstStyle/>
+                    <a:p>
+                      <a:r>
+                        <a:rPr sz="1300" b="0" i="0">
+                          <a:solidFill>
+                            <a:srgbClr val="202124"/>
+                          </a:solidFill>
+                          <a:latin typeface="Arial"/>
+                        </a:rPr>
+                        <a:t>10.21</a:t>
+                      </a:r>
+                    </a:p>
+                  </a:txBody>
+                  <a:tcPr>
+                    <a:lnL w="9525">
+                      <a:solidFill>
+                        <a:srgbClr val="5F6368"/>
+                      </a:solidFill>
+                    </a:lnL>
+                    <a:lnR w="9525">
+                      <a:solidFill>
+                        <a:srgbClr val="5F6368"/>
+                      </a:solidFill>
+                    </a:lnR>
+                    <a:lnT w="9525">
+                      <a:solidFill>
+                        <a:srgbClr val="5F6368"/>
+                      </a:solidFill>
+                    </a:lnT>
+                    <a:lnB w="9525">
+                      <a:solidFill>
+                        <a:srgbClr val="5F6368"/>
+                      </a:solidFill>
+                    </a:lnB>
+                    <a:solidFill>
+                      <a:srgbClr val="E8EFFA"/>
+                    </a:solidFill>
+                  </a:tcPr>
+                </a:tc>
+                <a:tc>
+                  <a:txBody>
+                    <a:bodyPr/>
+                    <a:lstStyle/>
+                    <a:p>
+                      <a:r>
+                        <a:rPr sz="1300" b="0" i="0">
+                          <a:solidFill>
+                            <a:srgbClr val="202124"/>
+                          </a:solidFill>
+                          <a:latin typeface="Arial"/>
+                        </a:rPr>
+                        <a:t>3.55</a:t>
+                      </a:r>
+                    </a:p>
+                  </a:txBody>
+                  <a:tcPr>
+                    <a:lnL w="9525">
+                      <a:solidFill>
+                        <a:srgbClr val="5F6368"/>
+                      </a:solidFill>
+                    </a:lnL>
+                    <a:lnR w="9525">
+                      <a:solidFill>
+                        <a:srgbClr val="5F6368"/>
+                      </a:solidFill>
+                    </a:lnR>
+                    <a:lnT w="9525">
+                      <a:solidFill>
+                        <a:srgbClr val="5F6368"/>
+                      </a:solidFill>
+                    </a:lnT>
+                    <a:lnB w="9525">
+                      <a:solidFill>
+                        <a:srgbClr val="5F6368"/>
+                      </a:solidFill>
+                    </a:lnB>
+                    <a:solidFill>
+                      <a:srgbClr val="E8EFFA"/>
+                    </a:solidFill>
+                  </a:tcPr>
+                </a:tc>
+              </a:tr>
+              <a:tr h="302455">
+                <a:tc>
+                  <a:txBody>
+                    <a:bodyPr/>
+                    <a:lstStyle/>
+                    <a:p>
+                      <a:r>
+                        <a:rPr sz="1300" b="0" i="0">
+                          <a:solidFill>
+                            <a:srgbClr val="202124"/>
+                          </a:solidFill>
+                          <a:latin typeface="Arial"/>
+                        </a:rPr>
+                        <a:t>11</a:t>
+                      </a:r>
+                    </a:p>
+                  </a:txBody>
+                  <a:tcPr>
+                    <a:lnL w="9525">
+                      <a:solidFill>
+                        <a:srgbClr val="5F6368"/>
+                      </a:solidFill>
+                    </a:lnL>
+                    <a:lnR w="9525">
+                      <a:solidFill>
+                        <a:srgbClr val="5F6368"/>
+                      </a:solidFill>
+                    </a:lnR>
+                    <a:lnT w="9525">
+                      <a:solidFill>
+                        <a:srgbClr val="5F6368"/>
+                      </a:solidFill>
+                    </a:lnT>
+                    <a:lnB w="9525">
+                      <a:solidFill>
+                        <a:srgbClr val="5F6368"/>
+                      </a:solidFill>
+                    </a:lnB>
+                    <a:solidFill>
+                      <a:srgbClr val="FFFFFF"/>
+                    </a:solidFill>
+                  </a:tcPr>
+                </a:tc>
+                <a:tc>
+                  <a:txBody>
+                    <a:bodyPr/>
+                    <a:lstStyle/>
+                    <a:p>
+                      <a:r>
+                        <a:rPr sz="1300" b="0" i="0">
+                          <a:solidFill>
+                            <a:srgbClr val="202124"/>
+                          </a:solidFill>
+                          <a:latin typeface="Arial"/>
+                        </a:rPr>
+                        <a:t>65.0</a:t>
+                      </a:r>
+                    </a:p>
+                  </a:txBody>
+                  <a:tcPr>
+                    <a:lnL w="9525">
+                      <a:solidFill>
+                        <a:srgbClr val="5F6368"/>
+                      </a:solidFill>
+                    </a:lnL>
+                    <a:lnR w="9525">
+                      <a:solidFill>
+                        <a:srgbClr val="5F6368"/>
+                      </a:solidFill>
+                    </a:lnR>
+                    <a:lnT w="9525">
+                      <a:solidFill>
+                        <a:srgbClr val="5F6368"/>
+                      </a:solidFill>
+                    </a:lnT>
+                    <a:lnB w="9525">
+                      <a:solidFill>
+                        <a:srgbClr val="5F6368"/>
+                      </a:solidFill>
+                    </a:lnB>
+                    <a:solidFill>
+                      <a:srgbClr val="FFFFFF"/>
+                    </a:solidFill>
+                  </a:tcPr>
+                </a:tc>
+                <a:tc>
+                  <a:txBody>
+                    <a:bodyPr/>
+                    <a:lstStyle/>
+                    <a:p>
+                      <a:r>
+                        <a:rPr sz="1300" b="0" i="0">
+                          <a:solidFill>
+                            <a:srgbClr val="202124"/>
+                          </a:solidFill>
+                          <a:latin typeface="Arial"/>
+                        </a:rPr>
+                        <a:t>4.92</a:t>
+                      </a:r>
+                    </a:p>
+                  </a:txBody>
+                  <a:tcPr>
+                    <a:lnL w="9525">
+                      <a:solidFill>
+                        <a:srgbClr val="5F6368"/>
+                      </a:solidFill>
+                    </a:lnL>
+                    <a:lnR w="9525">
+                      <a:solidFill>
+                        <a:srgbClr val="5F6368"/>
+                      </a:solidFill>
+                    </a:lnR>
+                    <a:lnT w="9525">
+                      <a:solidFill>
+                        <a:srgbClr val="5F6368"/>
+                      </a:solidFill>
+                    </a:lnT>
+                    <a:lnB w="9525">
+                      <a:solidFill>
+                        <a:srgbClr val="5F6368"/>
+                      </a:solidFill>
+                    </a:lnB>
+                    <a:solidFill>
+                      <a:srgbClr val="FFFFFF"/>
+                    </a:solidFill>
+                  </a:tcPr>
+                </a:tc>
+                <a:tc>
+                  <a:txBody>
+                    <a:bodyPr/>
+                    <a:lstStyle/>
+                    <a:p>
+                      <a:r>
+                        <a:rPr sz="1300" b="0" i="0">
+                          <a:solidFill>
+                            <a:srgbClr val="202124"/>
+                          </a:solidFill>
+                          <a:latin typeface="Arial"/>
+                        </a:rPr>
+                        <a:t>8.00</a:t>
+                      </a:r>
+                    </a:p>
+                  </a:txBody>
+                  <a:tcPr>
+                    <a:lnL w="9525">
+                      <a:solidFill>
+                        <a:srgbClr val="5F6368"/>
+                      </a:solidFill>
+                    </a:lnL>
+                    <a:lnR w="9525">
+                      <a:solidFill>
+                        <a:srgbClr val="5F6368"/>
+                      </a:solidFill>
+                    </a:lnR>
+                    <a:lnT w="9525">
+                      <a:solidFill>
+                        <a:srgbClr val="5F6368"/>
+                      </a:solidFill>
+                    </a:lnT>
+                    <a:lnB w="9525">
+                      <a:solidFill>
+                        <a:srgbClr val="5F6368"/>
+                      </a:solidFill>
+                    </a:lnB>
+                    <a:solidFill>
+                      <a:srgbClr val="FFFFFF"/>
+                    </a:solidFill>
+                  </a:tcPr>
+                </a:tc>
+                <a:tc>
+                  <a:txBody>
+                    <a:bodyPr/>
+                    <a:lstStyle/>
+                    <a:p>
+                      <a:r>
+                        <a:rPr sz="1300" b="0" i="0">
+                          <a:solidFill>
+                            <a:srgbClr val="202124"/>
+                          </a:solidFill>
+                          <a:latin typeface="Arial"/>
+                        </a:rPr>
+                        <a:t>0.98</a:t>
+                      </a:r>
+                    </a:p>
+                  </a:txBody>
+                  <a:tcPr>
+                    <a:lnL w="9525">
+                      <a:solidFill>
+                        <a:srgbClr val="5F6368"/>
+                      </a:solidFill>
+                    </a:lnL>
+                    <a:lnR w="9525">
+                      <a:solidFill>
+                        <a:srgbClr val="5F6368"/>
+                      </a:solidFill>
+                    </a:lnR>
+                    <a:lnT w="9525">
+                      <a:solidFill>
+                        <a:srgbClr val="5F6368"/>
+                      </a:solidFill>
+                    </a:lnT>
+                    <a:lnB w="9525">
+                      <a:solidFill>
+                        <a:srgbClr val="5F6368"/>
+                      </a:solidFill>
+                    </a:lnB>
+                    <a:solidFill>
+                      <a:srgbClr val="FFFFFF"/>
+                    </a:solidFill>
+                  </a:tcPr>
+                </a:tc>
+              </a:tr>
+              <a:tr h="302460">
+                <a:tc>
+                  <a:txBody>
+                    <a:bodyPr/>
+                    <a:lstStyle/>
+                    <a:p>
+                      <a:r>
+                        <a:rPr sz="1300" b="0" i="0">
+                          <a:solidFill>
+                            <a:srgbClr val="202124"/>
+                          </a:solidFill>
+                          <a:latin typeface="Arial"/>
+                        </a:rPr>
+                        <a:t>12</a:t>
+                      </a:r>
+                    </a:p>
+                  </a:txBody>
+                  <a:tcPr>
+                    <a:lnL w="9525">
+                      <a:solidFill>
+                        <a:srgbClr val="5F6368"/>
+                      </a:solidFill>
+                    </a:lnL>
+                    <a:lnR w="9525">
+                      <a:solidFill>
+                        <a:srgbClr val="5F6368"/>
+                      </a:solidFill>
+                    </a:lnR>
+                    <a:lnT w="9525">
+                      <a:solidFill>
+                        <a:srgbClr val="5F6368"/>
+                      </a:solidFill>
+                    </a:lnT>
+                    <a:lnB w="9525">
+                      <a:solidFill>
+                        <a:srgbClr val="5F6368"/>
+                      </a:solidFill>
+                    </a:lnB>
+                    <a:solidFill>
+                      <a:srgbClr val="E8EFFA"/>
+                    </a:solidFill>
+                  </a:tcPr>
+                </a:tc>
+                <a:tc>
+                  <a:txBody>
+                    <a:bodyPr/>
+                    <a:lstStyle/>
+                    <a:p>
+                      <a:r>
+                        <a:rPr sz="1300" b="0" i="0">
+                          <a:solidFill>
+                            <a:srgbClr val="202124"/>
+                          </a:solidFill>
+                          <a:latin typeface="Arial"/>
+                        </a:rPr>
+                        <a:t>60.5</a:t>
+                      </a:r>
+                    </a:p>
+                  </a:txBody>
+                  <a:tcPr>
+                    <a:lnL w="9525">
+                      <a:solidFill>
+                        <a:srgbClr val="5F6368"/>
+                      </a:solidFill>
+                    </a:lnL>
+                    <a:lnR w="9525">
+                      <a:solidFill>
+                        <a:srgbClr val="5F6368"/>
+                      </a:solidFill>
+                    </a:lnR>
+                    <a:lnT w="9525">
+                      <a:solidFill>
+                        <a:srgbClr val="5F6368"/>
+                      </a:solidFill>
+                    </a:lnT>
+                    <a:lnB w="9525">
+                      <a:solidFill>
+                        <a:srgbClr val="5F6368"/>
+                      </a:solidFill>
+                    </a:lnB>
+                    <a:solidFill>
+                      <a:srgbClr val="E8EFFA"/>
+                    </a:solidFill>
+                  </a:tcPr>
+                </a:tc>
+                <a:tc>
+                  <a:txBody>
+                    <a:bodyPr/>
+                    <a:lstStyle/>
+                    <a:p>
+                      <a:r>
+                        <a:rPr sz="1300" b="0" i="0">
+                          <a:solidFill>
+                            <a:srgbClr val="202124"/>
+                          </a:solidFill>
+                          <a:latin typeface="Arial"/>
+                        </a:rPr>
+                        <a:t>5.30</a:t>
+                      </a:r>
+                    </a:p>
+                  </a:txBody>
+                  <a:tcPr>
+                    <a:lnL w="9525">
+                      <a:solidFill>
+                        <a:srgbClr val="5F6368"/>
+                      </a:solidFill>
+                    </a:lnL>
+                    <a:lnR w="9525">
+                      <a:solidFill>
+                        <a:srgbClr val="5F6368"/>
+                      </a:solidFill>
+                    </a:lnR>
+                    <a:lnT w="9525">
+                      <a:solidFill>
+                        <a:srgbClr val="5F6368"/>
+                      </a:solidFill>
+                    </a:lnT>
+                    <a:lnB w="9525">
+                      <a:solidFill>
+                        <a:srgbClr val="5F6368"/>
+                      </a:solidFill>
+                    </a:lnB>
+                    <a:solidFill>
+                      <a:srgbClr val="E8EFFA"/>
+                    </a:solidFill>
+                  </a:tcPr>
+                </a:tc>
+                <a:tc>
+                  <a:txBody>
+                    <a:bodyPr/>
+                    <a:lstStyle/>
+                    <a:p>
+                      <a:r>
+                        <a:rPr sz="1300" b="0" i="0">
+                          <a:solidFill>
+                            <a:srgbClr val="202124"/>
+                          </a:solidFill>
+                          <a:latin typeface="Arial"/>
+                        </a:rPr>
+                        <a:t>9.75</a:t>
+                      </a:r>
+                    </a:p>
+                  </a:txBody>
+                  <a:tcPr>
+                    <a:lnL w="9525">
+                      <a:solidFill>
+                        <a:srgbClr val="5F6368"/>
+                      </a:solidFill>
+                    </a:lnL>
+                    <a:lnR w="9525">
+                      <a:solidFill>
+                        <a:srgbClr val="5F6368"/>
+                      </a:solidFill>
+                    </a:lnR>
+                    <a:lnT w="9525">
+                      <a:solidFill>
+                        <a:srgbClr val="5F6368"/>
+                      </a:solidFill>
+                    </a:lnT>
+                    <a:lnB w="9525">
+                      <a:solidFill>
+                        <a:srgbClr val="5F6368"/>
+                      </a:solidFill>
+                    </a:lnB>
+                    <a:solidFill>
+                      <a:srgbClr val="E8EFFA"/>
+                    </a:solidFill>
+                  </a:tcPr>
+                </a:tc>
+                <a:tc>
+                  <a:txBody>
+                    <a:bodyPr/>
+                    <a:lstStyle/>
+                    <a:p>
+                      <a:r>
+                        <a:rPr sz="1300" b="0" i="0">
+                          <a:solidFill>
+                            <a:srgbClr val="202124"/>
+                          </a:solidFill>
+                          <a:latin typeface="Arial"/>
+                        </a:rPr>
+                        <a:t>3.52</a:t>
+                      </a:r>
+                    </a:p>
+                  </a:txBody>
+                  <a:tcPr>
+                    <a:lnL w="9525">
+                      <a:solidFill>
+                        <a:srgbClr val="5F6368"/>
+                      </a:solidFill>
+                    </a:lnL>
+                    <a:lnR w="9525">
+                      <a:solidFill>
+                        <a:srgbClr val="5F6368"/>
+                      </a:solidFill>
+                    </a:lnR>
+                    <a:lnT w="9525">
+                      <a:solidFill>
+                        <a:srgbClr val="5F6368"/>
+                      </a:solidFill>
+                    </a:lnT>
+                    <a:lnB w="9525">
+                      <a:solidFill>
+                        <a:srgbClr val="5F6368"/>
+                      </a:solidFill>
+                    </a:lnB>
+                    <a:solidFill>
+                      <a:srgbClr val="E8EFFA"/>
+                    </a:solidFill>
+                  </a:tcPr>
+                </a:tc>
+              </a:tr>
+            </a:tbl>
+          </a:graphicData>
+        </a:graphic>
+      </p:graphicFrame>
+      <p:sp>
+        <p:nvSpPr>
+          <p:cNvPr id="7" name="raw-table__footer"/>
+          <p:cNvSpPr txBox="1"/>
+          <p:nvPr/>
+        </p:nvSpPr>
+        <p:spPr>
+          <a:xfrm>
+            <a:off x="548640" y="5166360"/>
+            <a:ext cx="6949440" cy="365760"/>
+          </a:xfrm>
+          <a:prstGeom prst="rect">
+            <a:avLst/>
+          </a:prstGeom>
+          <a:noFill/>
+        </p:spPr>
+        <p:txBody>
+          <a:bodyPr wrap="square" lIns="0" rIns="0" tIns="0" bIns="0">
+            <a:spAutoFit/>
+          </a:bodyPr>
+          <a:lstStyle/>
+          <a:p>
+            <a:r>
+              <a:rPr sz="800" b="0" i="0">
+                <a:solidFill>
+                  <a:srgbClr val="5F6368"/>
+                </a:solidFill>
+                <a:latin typeface="Arial"/>
+              </a:rPr>
+              <a:t>Notes: Raw per-participant values, one row per participant, with no aggregation or smoothing applied.</a:t>
+            </a:r>
+          </a:p>
+        </p:txBody>
+      </p:sp>
+      <p:pic>
+        <p:nvPicPr>
+          <p:cNvPr id="8" name="flextable-summary" descr="A formatted summary table of mean, median, minimum, and maximum weight, dose, peak concentration, and time to peak concentration across all 12 participants, with a merged &quot;Population Summary&quot; header and the mean row highlighted."/>
+          <p:cNvPicPr>
+            <a:picLocks noChangeAspect="1"/>
+          </p:cNvPicPr>
+          <p:nvPr/>
+        </p:nvPicPr>
+        <p:blipFill>
+          <a:blip r:embed="rId3"/>
+          <a:srcRect/>
+          <a:stretch>
+            <a:fillRect/>
+          </a:stretch>
+        </p:blipFill>
+        <p:spPr>
+          <a:xfrm>
+            <a:off x="7772400" y="1308391"/>
+            <a:ext cx="3840480" cy="1177977"/>
+          </a:xfrm>
+          <a:prstGeom prst="rect">
+            <a:avLst/>
+          </a:prstGeom>
+        </p:spPr>
+      </p:pic>
+      <p:sp>
+        <p:nvSpPr>
+          <p:cNvPr id="9" name="flextable-summary__footer"/>
+          <p:cNvSpPr txBox="1"/>
+          <p:nvPr/>
+        </p:nvSpPr>
+        <p:spPr>
+          <a:xfrm>
+            <a:off x="7772400" y="2560320"/>
+            <a:ext cx="3840480" cy="365760"/>
+          </a:xfrm>
+          <a:prstGeom prst="rect">
+            <a:avLst/>
+          </a:prstGeom>
+          <a:noFill/>
+        </p:spPr>
+        <p:txBody>
+          <a:bodyPr wrap="square" lIns="0" rIns="0" tIns="0" bIns="0">
+            <a:spAutoFit/>
+          </a:bodyPr>
+          <a:lstStyle/>
+          <a:p>
+            <a:r>
+              <a:rPr sz="800" b="0" i="0">
+                <a:solidFill>
+                  <a:srgbClr val="5F6368"/>
+                </a:solidFill>
+                <a:latin typeface="Arial"/>
+              </a:rPr>
+              <a:t>Notes: Population-level summary statistics (mean, median, min, max) across all 12 participants; the mean row is highlighted.</a:t>
+            </a:r>
+          </a:p>
+          <a:p>
+            <a:r>
+              <a:rPr sz="800" b="0" i="0">
+                <a:solidFill>
+                  <a:srgbClr val="5F6368"/>
+                </a:solidFill>
+                <a:latin typeface="Arial"/>
+              </a:rPr>
+              <a:t>Abbreviations: PK: pharmacokinetic.</a:t>
+            </a:r>
+          </a:p>
+        </p:txBody>
+      </p:sp>
+      <p:sp>
+        <p:nvSpPr>
+          <p:cNvPr id="10" name="__furniture_status"/>
+          <p:cNvSpPr txBox="1"/>
+          <p:nvPr/>
+        </p:nvSpPr>
+        <p:spPr>
+          <a:xfrm rot="19800000">
+            <a:off x="1371600" y="2286000"/>
+            <a:ext cx="9448495" cy="2286000"/>
+          </a:xfrm>
+          <a:prstGeom prst="rect">
+            <a:avLst/>
+          </a:prstGeom>
+          <a:noFill/>
+        </p:spPr>
+        <p:txBody>
+          <a:bodyPr wrap="square" lIns="0" rIns="0" tIns="0" bIns="0" anchor="ctr">
+            <a:spAutoFit/>
+          </a:bodyPr>
+          <a:lstStyle/>
+          <a:p>
+            <a:pPr algn="ctr"/>
+            <a:r>
+              <a:rPr sz="9600" b="1" i="0">
+                <a:solidFill>
+                  <a:srgbClr val="2457A6">
+                    <a:alpha val="28000"/>
+                  </a:srgbClr>
+                </a:solidFill>
+                <a:latin typeface="Arial"/>
+              </a:rPr>
+              <a:t>DEMO</a:t>
+            </a:r>
+          </a:p>
+        </p:txBody>
+      </p:sp>
+    </p:spTree>
+  </p:cSld>
+  <p:clrMapOvr>
+    <a:masterClrMapping/>
+  </p:clrMapOvr>
+</p:sld>
+</file>
+
+<file path=ppt/slides/slide6.xml><?xml version="1.0" encoding="utf-8"?>
+<p:sld xmlns:a="http://schemas.openxmlformats.org/drawingml/2006/main" xmlns:p="http://schemas.openxmlformats.org/presentationml/2006/main" xmlns:r="http://schemas.openxmlformats.org/officeDocument/2006/relationships">
+  <p:cSld>
+    <p:bg>
+      <p:bgPr>
+        <a:gradFill rotWithShape="1">
+          <a:gsLst>
+            <a:gs pos="0">
+              <a:srgbClr val="F7FBFF"/>
+            </a:gs>
+            <a:gs pos="100000">
+              <a:srgbClr val="9ECAE1"/>
+            </a:gs>
+          </a:gsLst>
+          <a:lin scaled="0" ang="13500000"/>
+        </a:gradFill>
+        <a:effectLst/>
+      </p:bgPr>
+    </p:bg>
+    <p:spTree>
+      <p:nvGrpSpPr>
+        <p:cNvPr id="1" name=""/>
+        <p:cNvGrpSpPr/>
+        <p:nvPr/>
+      </p:nvGrpSpPr>
+      <p:grpSpPr/>
+      <p:pic>
+        <p:nvPicPr>
+          <p:cNvPr id="2" name="__furniture_background" descr="Background image"/>
+          <p:cNvPicPr>
+            <a:picLocks noChangeAspect="1"/>
+          </p:cNvPicPr>
+          <p:nvPr/>
+        </p:nvPicPr>
+        <p:blipFill>
+          <a:blip r:embed="rId2"/>
+          <a:srcRect/>
+          <a:stretch>
+            <a:fillRect/>
+          </a:stretch>
+        </p:blipFill>
+        <p:spPr>
+          <a:xfrm>
+            <a:off x="0" y="86"/>
+            <a:ext cx="12191695" cy="6857828"/>
+          </a:xfrm>
+          <a:prstGeom prst="rect">
+            <a:avLst/>
+          </a:prstGeom>
+        </p:spPr>
+      </p:pic>
+      <p:sp>
+        <p:nvSpPr>
+          <p:cNvPr id="3" name="__furniture_branding"/>
+          <p:cNvSpPr txBox="1"/>
+          <p:nvPr/>
+        </p:nvSpPr>
+        <p:spPr>
+          <a:xfrm>
+            <a:off x="320040" y="6446520"/>
+            <a:ext cx="3657600" cy="274320"/>
+          </a:xfrm>
+          <a:prstGeom prst="rect">
+            <a:avLst/>
+          </a:prstGeom>
+          <a:noFill/>
+        </p:spPr>
+        <p:txBody>
+          <a:bodyPr wrap="square" lIns="0" rIns="0" tIns="0" bIns="0">
+            <a:spAutoFit/>
+          </a:bodyPr>
+          <a:lstStyle/>
+          <a:p>
+            <a:r>
+              <a:rPr sz="800" b="0" i="0">
+                <a:solidFill>
+                  <a:srgbClr val="5F6368"/>
+                </a:solidFill>
+                <a:latin typeface="Arial"/>
+              </a:rPr>
+              <a:t>Deckifyr Demo</a:t>
+            </a:r>
+          </a:p>
+        </p:txBody>
+      </p:sp>
+      <p:sp>
+        <p:nvSpPr>
+          <p:cNvPr id="4" name="__furniture_page_number"/>
+          <p:cNvSpPr txBox="1"/>
+          <p:nvPr/>
+        </p:nvSpPr>
+        <p:spPr>
+          <a:xfrm>
+            <a:off x="5029200" y="6446520"/>
+            <a:ext cx="914400" cy="274320"/>
+          </a:xfrm>
+          <a:prstGeom prst="rect">
+            <a:avLst/>
+          </a:prstGeom>
+          <a:noFill/>
+        </p:spPr>
+        <p:txBody>
+          <a:bodyPr wrap="square" lIns="0" rIns="0" tIns="0" bIns="0">
+            <a:spAutoFit/>
+          </a:bodyPr>
+          <a:lstStyle/>
+          <a:p>
+            <a:r>
+              <a:rPr sz="800" b="0" i="0">
+                <a:solidFill>
+                  <a:srgbClr val="5F6368"/>
+                </a:solidFill>
+                <a:latin typeface="Arial"/>
+              </a:rPr>
+              <a:t>6 / 6</a:t>
             </a:r>
           </a:p>
         </p:txBody>
